--- a/presentation/260916_AI활용_업무지침네비게이터_5차 수정.pptx
+++ b/presentation/260916_AI활용_업무지침네비게이터_5차 수정.pptx
@@ -20323,24 +20323,97 @@
               <a:buChar char="§"/>
             </a:pPr>
             <a:r>
-              <a:rPr lang="ko-KR" altLang="en-US" sz="1400">
-                <a:latin typeface="+mn-ea"/>
-              </a:rPr>
-              <a:t> 업무 문제를 </a:t>
-            </a:r>
-            <a:r>
-              <a:rPr lang="en-US" altLang="ko-KR" sz="1400">
-                <a:latin typeface="+mn-ea"/>
-              </a:rPr>
-              <a:t>AI </a:t>
-            </a:r>
-            <a:r>
-              <a:rPr lang="ko-KR" altLang="en-US" sz="1400">
-                <a:latin typeface="+mn-ea"/>
-              </a:rPr>
-              <a:t>관점에서 다시 바라보는 경험</a:t>
-            </a:r>
-            <a:endParaRPr lang="en-US" altLang="ko-KR" sz="1400">
+              <a:rPr lang="en-US" altLang="ko-KR" sz="1400" spc="-40">
+                <a:latin typeface="+mn-ea"/>
+              </a:rPr>
+              <a:t> Python </a:t>
+            </a:r>
+            <a:r>
+              <a:rPr lang="ko-KR" altLang="en-US" sz="1400" spc="-40">
+                <a:latin typeface="+mn-ea"/>
+              </a:rPr>
+              <a:t>기초</a:t>
+            </a:r>
+            <a:r>
+              <a:rPr lang="en-US" altLang="ko-KR" sz="1400" spc="-40">
+                <a:latin typeface="+mn-ea"/>
+              </a:rPr>
+              <a:t>, VS</a:t>
+            </a:r>
+            <a:r>
+              <a:rPr lang="ko-KR" altLang="en-US" sz="1400" spc="-40">
+                <a:latin typeface="+mn-ea"/>
+              </a:rPr>
+              <a:t> </a:t>
+            </a:r>
+            <a:r>
+              <a:rPr lang="en-US" altLang="ko-KR" sz="1400" spc="-40">
+                <a:latin typeface="+mn-ea"/>
+              </a:rPr>
+              <a:t>Code,</a:t>
+            </a:r>
+            <a:r>
+              <a:rPr lang="ko-KR" altLang="en-US" sz="1400" spc="-40">
+                <a:latin typeface="+mn-ea"/>
+              </a:rPr>
+              <a:t> </a:t>
+            </a:r>
+            <a:r>
+              <a:rPr lang="en-US" altLang="ko-KR" sz="1400" spc="-40">
+                <a:latin typeface="+mn-ea"/>
+              </a:rPr>
+              <a:t>GitHub, LangChain, RAG </a:t>
+            </a:r>
+            <a:r>
+              <a:rPr lang="ko-KR" altLang="en-US" sz="1400" spc="-40">
+                <a:latin typeface="+mn-ea"/>
+              </a:rPr>
+              <a:t>등</a:t>
+            </a:r>
+            <a:endParaRPr lang="en-US" altLang="ko-KR" sz="1400" spc="-40">
+              <a:latin typeface="+mn-ea"/>
+            </a:endParaRPr>
+          </a:p>
+          <a:p>
+            <a:pPr>
+              <a:spcBef>
+                <a:spcPts val="500"/>
+              </a:spcBef>
+              <a:spcAft>
+                <a:spcPts val="500"/>
+              </a:spcAft>
+              <a:buClr>
+                <a:schemeClr val="accent1">
+                  <a:lumMod val="60000"/>
+                  <a:lumOff val="40000"/>
+                </a:schemeClr>
+              </a:buClr>
+            </a:pPr>
+            <a:r>
+              <a:rPr lang="en-US" altLang="ko-KR" sz="1400" spc="-40">
+                <a:latin typeface="+mn-ea"/>
+              </a:rPr>
+              <a:t>  </a:t>
+            </a:r>
+            <a:r>
+              <a:rPr lang="ko-KR" altLang="en-US" sz="1400" spc="-40">
+                <a:latin typeface="+mn-ea"/>
+              </a:rPr>
+              <a:t>새로운 개념 학습</a:t>
+            </a:r>
+            <a:r>
+              <a:rPr lang="en-US" altLang="ko-KR" sz="1400" spc="-40">
+                <a:latin typeface="+mn-ea"/>
+              </a:rPr>
+              <a:t> </a:t>
+            </a:r>
+            <a:r>
+              <a:rPr lang="ko-KR" altLang="en-US" sz="1400" spc="-40">
+                <a:latin typeface="+mn-ea"/>
+              </a:rPr>
+              <a:t>→ 실제 웹 서비스 구현에 활용</a:t>
+            </a:r>
+            <a:endParaRPr lang="en-US" altLang="ko-KR" sz="1400" spc="-40">
               <a:latin typeface="+mn-ea"/>
             </a:endParaRPr>
           </a:p>
@@ -20362,97 +20435,36 @@
               <a:buChar char="§"/>
             </a:pPr>
             <a:r>
-              <a:rPr lang="en-US" altLang="ko-KR" sz="1400">
-                <a:latin typeface="+mn-ea"/>
-              </a:rPr>
-              <a:t> Python </a:t>
-            </a:r>
-            <a:r>
-              <a:rPr lang="ko-KR" altLang="en-US" sz="1400">
-                <a:latin typeface="+mn-ea"/>
-              </a:rPr>
-              <a:t>기초</a:t>
-            </a:r>
-            <a:r>
-              <a:rPr lang="en-US" altLang="ko-KR" sz="1400">
-                <a:latin typeface="+mn-ea"/>
-              </a:rPr>
-              <a:t>, VS</a:t>
-            </a:r>
-            <a:r>
-              <a:rPr lang="ko-KR" altLang="en-US" sz="1400">
-                <a:latin typeface="+mn-ea"/>
-              </a:rPr>
-              <a:t> </a:t>
-            </a:r>
-            <a:r>
-              <a:rPr lang="en-US" altLang="ko-KR" sz="1400">
-                <a:latin typeface="+mn-ea"/>
-              </a:rPr>
-              <a:t>Code,</a:t>
-            </a:r>
-            <a:r>
-              <a:rPr lang="ko-KR" altLang="en-US" sz="1400">
-                <a:latin typeface="+mn-ea"/>
-              </a:rPr>
-              <a:t> </a:t>
-            </a:r>
-            <a:r>
-              <a:rPr lang="en-US" altLang="ko-KR" sz="1400">
-                <a:latin typeface="+mn-ea"/>
-              </a:rPr>
-              <a:t>GitHub, LangChain, RAG </a:t>
-            </a:r>
-            <a:r>
-              <a:rPr lang="ko-KR" altLang="en-US" sz="1400">
-                <a:latin typeface="+mn-ea"/>
-              </a:rPr>
-              <a:t>등</a:t>
-            </a:r>
-            <a:endParaRPr lang="en-US" altLang="ko-KR" sz="1400">
-              <a:latin typeface="+mn-ea"/>
-            </a:endParaRPr>
-          </a:p>
-          <a:p>
-            <a:pPr>
-              <a:spcBef>
-                <a:spcPts val="500"/>
-              </a:spcBef>
-              <a:spcAft>
-                <a:spcPts val="500"/>
-              </a:spcAft>
-              <a:buClr>
-                <a:schemeClr val="accent1">
-                  <a:lumMod val="60000"/>
-                  <a:lumOff val="40000"/>
-                </a:schemeClr>
-              </a:buClr>
-            </a:pPr>
-            <a:r>
-              <a:rPr lang="en-US" altLang="ko-KR" sz="1400">
-                <a:latin typeface="+mn-ea"/>
-              </a:rPr>
-              <a:t>  </a:t>
-            </a:r>
-            <a:r>
-              <a:rPr lang="ko-KR" altLang="en-US" sz="1400">
-                <a:latin typeface="+mn-ea"/>
-              </a:rPr>
-              <a:t>새로운 개념 학습</a:t>
-            </a:r>
-            <a:r>
-              <a:rPr lang="en-US" altLang="ko-KR" sz="1400">
-                <a:latin typeface="+mn-ea"/>
-              </a:rPr>
-              <a:t> </a:t>
-            </a:r>
-            <a:r>
-              <a:rPr lang="ko-KR" altLang="en-US" sz="1400">
-                <a:latin typeface="+mn-ea"/>
-              </a:rPr>
-              <a:t>→ 실제 웹 서비스 구현에 활용</a:t>
-            </a:r>
-            <a:endParaRPr lang="en-US" altLang="ko-KR" sz="1400">
+              <a:rPr lang="ko-KR" altLang="en-US" sz="1400" spc="-40">
+                <a:latin typeface="+mn-ea"/>
+              </a:rPr>
+              <a:t> 골든셋 평가로 주관부서 매칭 정확도 </a:t>
+            </a:r>
+            <a:r>
+              <a:rPr lang="en-US" altLang="ko-KR" sz="1400" spc="-40">
+                <a:latin typeface="+mn-ea"/>
+              </a:rPr>
+              <a:t>79</a:t>
+            </a:r>
+            <a:r>
+              <a:rPr lang="ko-KR" altLang="en-US" sz="1400" spc="-40">
+                <a:latin typeface="+mn-ea"/>
+              </a:rPr>
+              <a:t>→</a:t>
+            </a:r>
+            <a:r>
+              <a:rPr lang="en-US" altLang="ko-KR" sz="1400" spc="-40">
+                <a:latin typeface="+mn-ea"/>
+              </a:rPr>
+              <a:t>95% </a:t>
+            </a:r>
+            <a:r>
+              <a:rPr lang="ko-KR" altLang="en-US" sz="1400" spc="-40">
+                <a:latin typeface="+mn-ea"/>
+              </a:rPr>
+              <a:t>개선</a:t>
+            </a:r>
+            <a:endParaRPr lang="en-US" altLang="ko-KR" sz="1400" spc="-40">
               <a:latin typeface="+mn-ea"/>
             </a:endParaRPr>
           </a:p>
@@ -20474,36 +20486,30 @@
               <a:buChar char="§"/>
             </a:pPr>
             <a:r>
-              <a:rPr lang="ko-KR" altLang="en-US" sz="1400">
-                <a:latin typeface="+mn-ea"/>
-              </a:rPr>
-              <a:t> </a:t>
-            </a:r>
-            <a:r>
-              <a:rPr lang="en-US" altLang="ko-KR" sz="1400">
-                <a:latin typeface="+mn-ea"/>
-              </a:rPr>
-              <a:t>LangSmith </a:t>
-            </a:r>
-            <a:r>
-              <a:rPr lang="ko-KR" altLang="en-US" sz="1400">
-                <a:latin typeface="+mn-ea"/>
-              </a:rPr>
-              <a:t>트레이싱</a:t>
-            </a:r>
-            <a:r>
-              <a:rPr lang="en-US" altLang="ko-KR" sz="1400">
+              <a:rPr lang="en-US" altLang="ko-KR" sz="1400" spc="-40">
+                <a:latin typeface="+mn-ea"/>
+              </a:rPr>
+              <a:t> LangSmith</a:t>
+            </a:r>
+            <a:r>
+              <a:rPr lang="ko-KR" altLang="en-US" sz="1400" spc="-40">
+                <a:latin typeface="+mn-ea"/>
+              </a:rPr>
+              <a:t> 트레이싱</a:t>
+            </a:r>
+            <a:r>
+              <a:rPr lang="en-US" altLang="ko-KR" sz="1400" spc="-40">
                 <a:latin typeface="+mn-ea"/>
               </a:rPr>
               <a:t>·</a:t>
             </a:r>
             <a:r>
-              <a:rPr lang="ko-KR" altLang="en-US" sz="1400">
-                <a:latin typeface="+mn-ea"/>
-              </a:rPr>
-              <a:t>자동 채점 시스템 구축 경험</a:t>
-            </a:r>
-            <a:endParaRPr lang="en-US" altLang="ko-KR" sz="1400">
+              <a:rPr lang="ko-KR" altLang="en-US" sz="1400" spc="-40">
+                <a:latin typeface="+mn-ea"/>
+              </a:rPr>
+              <a:t>자동 채점 시스템 구축 </a:t>
+            </a:r>
+            <a:endParaRPr lang="en-US" altLang="ko-KR" sz="1400" spc="-40">
               <a:latin typeface="+mn-ea"/>
             </a:endParaRPr>
           </a:p>
@@ -20523,8 +20529,8 @@
         </p:nvSpPr>
         <p:spPr>
           <a:xfrm>
-            <a:off x="5015346" y="1878502"/>
-            <a:ext cx="4568663" cy="1338828"/>
+            <a:off x="5015345" y="1878502"/>
+            <a:ext cx="5219699" cy="1338828"/>
           </a:xfrm>
           <a:prstGeom prst="rect">
             <a:avLst/>
@@ -20644,20 +20650,17 @@
               <a:t> </a:t>
             </a:r>
             <a:r>
-              <a:rPr lang="ko-KR" altLang="en-US" sz="1400"/>
-              <a:t>재순위화</a:t>
-            </a:r>
-            <a:r>
-              <a:rPr lang="en-US" altLang="ko-KR" sz="1400"/>
-              <a:t>(rerank) </a:t>
-            </a:r>
-            <a:r>
-              <a:rPr lang="ko-KR" altLang="en-US" sz="1400"/>
-              <a:t>등 검색 정확도 근본 개선</a:t>
-            </a:r>
-            <a:endParaRPr lang="en-US" altLang="ko-KR" sz="1400">
-              <a:latin typeface="+mn-ea"/>
-            </a:endParaRPr>
+              <a:rPr lang="ko-KR" altLang="en-US" sz="1400" spc="-40">
+                <a:latin typeface="+mn-ea"/>
+              </a:rPr>
+              <a:t>임베딩 유사도만으로 애매한 경계 사례 보완 </a:t>
+            </a:r>
+            <a:r>
+              <a:rPr lang="en-US" altLang="ko-KR" sz="1400" spc="-40">
+                <a:latin typeface="+mn-ea"/>
+              </a:rPr>
+              <a:t>(Reranking)</a:t>
+            </a:r>
           </a:p>
           <a:p>
             <a:pPr marL="90488" indent="-90488">
@@ -20686,7 +20689,7 @@
               <a:rPr lang="ko-KR" altLang="en-US" sz="1400">
                 <a:latin typeface="+mn-ea"/>
               </a:rPr>
-              <a:t>현업 사용자 의견을 반영한 서비스 개선</a:t>
+              <a:t>현업 사용자 의견을 반영한 서비스 향상</a:t>
             </a:r>
             <a:endParaRPr lang="en-US" altLang="ko-KR" sz="1400">
               <a:latin typeface="+mn-ea"/>

--- a/presentation/260916_AI활용_업무지침네비게이터_5차 수정.pptx
+++ b/presentation/260916_AI활용_업무지침네비게이터_5차 수정.pptx
@@ -12,9 +12,9 @@
     <p:sldId id="263" r:id="rId3"/>
     <p:sldId id="278" r:id="rId4"/>
     <p:sldId id="279" r:id="rId5"/>
-    <p:sldId id="282" r:id="rId6"/>
+    <p:sldId id="284" r:id="rId6"/>
     <p:sldId id="280" r:id="rId7"/>
-    <p:sldId id="281" r:id="rId8"/>
+    <p:sldId id="283" r:id="rId8"/>
   </p:sldIdLst>
   <p:sldSz cx="9906000" cy="6858000" type="A4"/>
   <p:notesSz cx="6858000" cy="9144000"/>
@@ -5219,8 +5219,8 @@
         </p:nvSpPr>
         <p:spPr>
           <a:xfrm>
-            <a:off x="400395" y="5988125"/>
-            <a:ext cx="9289581" cy="505290"/>
+            <a:off x="330495" y="6092035"/>
+            <a:ext cx="9409457" cy="505290"/>
           </a:xfrm>
           <a:prstGeom prst="rect">
             <a:avLst/>
@@ -5260,43 +5260,1085 @@
           <a:bodyPr rtlCol="0" anchor="ctr"/>
           <a:lstStyle/>
           <a:p>
+            <a:r>
+              <a:rPr lang="ko-KR" altLang="en-US" sz="1500" b="1">
+                <a:solidFill>
+                  <a:schemeClr val="tx1"/>
+                </a:solidFill>
+                <a:latin typeface="+mn-ea"/>
+              </a:rPr>
+              <a:t>        필요한 지침을 빠르게 찾아</a:t>
+            </a:r>
+            <a:r>
+              <a:rPr lang="en-US" altLang="ko-KR" sz="1500" b="1">
+                <a:solidFill>
+                  <a:schemeClr val="tx1"/>
+                </a:solidFill>
+                <a:latin typeface="+mn-ea"/>
+              </a:rPr>
+              <a:t>, </a:t>
+            </a:r>
+            <a:r>
+              <a:rPr lang="ko-KR" altLang="en-US" sz="1500" b="1">
+                <a:solidFill>
+                  <a:schemeClr val="tx1"/>
+                </a:solidFill>
+                <a:latin typeface="+mn-ea"/>
+              </a:rPr>
+              <a:t>시작부터 완료까지 정확하게 업무를 처리하도록 체계적으로 지원</a:t>
+            </a:r>
+          </a:p>
+        </p:txBody>
+      </p:sp>
+      <p:sp>
+        <p:nvSpPr>
+          <p:cNvPr id="62" name="사각형: 둥근 모서리 61">
+            <a:extLst>
+              <a:ext uri="{FF2B5EF4-FFF2-40B4-BE49-F238E27FC236}">
+                <a16:creationId xmlns:a16="http://schemas.microsoft.com/office/drawing/2014/main" id="{BFB32620-BF19-4B11-B076-46885445DCD3}"/>
+              </a:ext>
+            </a:extLst>
+          </p:cNvPr>
+          <p:cNvSpPr>
+            <a:spLocks noGrp="1"/>
+          </p:cNvSpPr>
+          <p:nvPr/>
+        </p:nvSpPr>
+        <p:spPr>
+          <a:xfrm>
+            <a:off x="330495" y="4817740"/>
+            <a:ext cx="9409457" cy="999163"/>
+          </a:xfrm>
+          <a:prstGeom prst="roundRect">
+            <a:avLst>
+              <a:gd name="adj" fmla="val 5139"/>
+            </a:avLst>
+          </a:prstGeom>
+          <a:noFill/>
+          <a:ln w="12700">
+            <a:solidFill>
+              <a:schemeClr val="bg1">
+                <a:lumMod val="75000"/>
+              </a:schemeClr>
+            </a:solidFill>
+            <a:prstDash val="solid"/>
+          </a:ln>
+        </p:spPr>
+        <p:txBody>
+          <a:bodyPr anchor="ctr" anchorCtr="0"/>
+          <a:lstStyle/>
+          <a:p>
             <a:pPr algn="ctr"/>
-            <a:r>
-              <a:rPr lang="ko-KR" altLang="en-US" sz="1500" b="1">
-                <a:solidFill>
-                  <a:schemeClr val="tx1"/>
-                </a:solidFill>
-                <a:latin typeface="+mn-ea"/>
-              </a:rPr>
-              <a:t>필요한 지침을 빠르게 찾아</a:t>
-            </a:r>
-            <a:r>
-              <a:rPr lang="en-US" altLang="ko-KR" sz="1500" b="1">
-                <a:solidFill>
-                  <a:schemeClr val="tx1"/>
-                </a:solidFill>
-                <a:latin typeface="+mn-ea"/>
-              </a:rPr>
-              <a:t>, </a:t>
-            </a:r>
-            <a:r>
-              <a:rPr lang="ko-KR" altLang="en-US" sz="1500" b="1">
-                <a:solidFill>
-                  <a:schemeClr val="tx1"/>
-                </a:solidFill>
-                <a:latin typeface="+mn-ea"/>
-              </a:rPr>
-              <a:t>시작부터 완료까지 정확하게 업무를 처리하도록 체계적으로 지원</a:t>
-            </a:r>
+            <a:endParaRPr lang="ko-KR" altLang="en-US" sz="1400" b="1"/>
+          </a:p>
+        </p:txBody>
+      </p:sp>
+      <p:sp>
+        <p:nvSpPr>
+          <p:cNvPr id="64" name="이등변 삼각형 63">
+            <a:extLst>
+              <a:ext uri="{FF2B5EF4-FFF2-40B4-BE49-F238E27FC236}">
+                <a16:creationId xmlns:a16="http://schemas.microsoft.com/office/drawing/2014/main" id="{CBE0F7A1-7FBC-4044-82C1-997A319E3071}"/>
+              </a:ext>
+            </a:extLst>
+          </p:cNvPr>
+          <p:cNvSpPr/>
+          <p:nvPr/>
+        </p:nvSpPr>
+        <p:spPr>
+          <a:xfrm rot="5400000">
+            <a:off x="2699726" y="5328339"/>
+            <a:ext cx="166088" cy="120792"/>
+          </a:xfrm>
+          <a:prstGeom prst="triangle">
+            <a:avLst/>
+          </a:prstGeom>
+          <a:solidFill>
+            <a:schemeClr val="bg1">
+              <a:lumMod val="75000"/>
+            </a:schemeClr>
+          </a:solidFill>
+          <a:ln>
+            <a:noFill/>
+          </a:ln>
+        </p:spPr>
+        <p:style>
+          <a:lnRef idx="2">
+            <a:schemeClr val="accent1">
+              <a:shade val="50000"/>
+            </a:schemeClr>
+          </a:lnRef>
+          <a:fillRef idx="1">
+            <a:schemeClr val="accent1"/>
+          </a:fillRef>
+          <a:effectRef idx="0">
+            <a:schemeClr val="accent1"/>
+          </a:effectRef>
+          <a:fontRef idx="minor">
+            <a:schemeClr val="lt1"/>
+          </a:fontRef>
+        </p:style>
+        <p:txBody>
+          <a:bodyPr rtlCol="0" anchor="ctr"/>
+          <a:lstStyle/>
+          <a:p>
+            <a:pPr algn="ctr"/>
+            <a:endParaRPr lang="ko-KR" altLang="en-US"/>
+          </a:p>
+        </p:txBody>
+      </p:sp>
+      <p:sp>
+        <p:nvSpPr>
+          <p:cNvPr id="65" name="이등변 삼각형 64">
+            <a:extLst>
+              <a:ext uri="{FF2B5EF4-FFF2-40B4-BE49-F238E27FC236}">
+                <a16:creationId xmlns:a16="http://schemas.microsoft.com/office/drawing/2014/main" id="{2EDC7E73-7337-42B2-928F-D70EB47D31EC}"/>
+              </a:ext>
+            </a:extLst>
+          </p:cNvPr>
+          <p:cNvSpPr/>
+          <p:nvPr/>
+        </p:nvSpPr>
+        <p:spPr>
+          <a:xfrm rot="5400000">
+            <a:off x="7072446" y="5330017"/>
+            <a:ext cx="166088" cy="120792"/>
+          </a:xfrm>
+          <a:prstGeom prst="triangle">
+            <a:avLst/>
+          </a:prstGeom>
+          <a:solidFill>
+            <a:schemeClr val="bg1">
+              <a:lumMod val="75000"/>
+            </a:schemeClr>
+          </a:solidFill>
+          <a:ln>
+            <a:noFill/>
+          </a:ln>
+        </p:spPr>
+        <p:style>
+          <a:lnRef idx="2">
+            <a:schemeClr val="accent1">
+              <a:shade val="50000"/>
+            </a:schemeClr>
+          </a:lnRef>
+          <a:fillRef idx="1">
+            <a:schemeClr val="accent1"/>
+          </a:fillRef>
+          <a:effectRef idx="0">
+            <a:schemeClr val="accent1"/>
+          </a:effectRef>
+          <a:fontRef idx="minor">
+            <a:schemeClr val="lt1"/>
+          </a:fontRef>
+        </p:style>
+        <p:txBody>
+          <a:bodyPr rtlCol="0" anchor="ctr"/>
+          <a:lstStyle/>
+          <a:p>
+            <a:pPr algn="ctr"/>
+            <a:endParaRPr lang="ko-KR" altLang="en-US"/>
+          </a:p>
+        </p:txBody>
+      </p:sp>
+      <p:sp>
+        <p:nvSpPr>
+          <p:cNvPr id="3" name="사각형: 둥근 모서리 2">
+            <a:extLst>
+              <a:ext uri="{FF2B5EF4-FFF2-40B4-BE49-F238E27FC236}">
+                <a16:creationId xmlns:a16="http://schemas.microsoft.com/office/drawing/2014/main" id="{1D30FD96-B91F-4CF6-97C0-E4128ECEA73A}"/>
+              </a:ext>
+            </a:extLst>
+          </p:cNvPr>
+          <p:cNvSpPr/>
+          <p:nvPr/>
+        </p:nvSpPr>
+        <p:spPr>
+          <a:xfrm>
+            <a:off x="330495" y="1217806"/>
+            <a:ext cx="2985462" cy="2881439"/>
+          </a:xfrm>
+          <a:prstGeom prst="roundRect">
+            <a:avLst>
+              <a:gd name="adj" fmla="val 5661"/>
+            </a:avLst>
+          </a:prstGeom>
+          <a:solidFill>
+            <a:schemeClr val="bg1"/>
+          </a:solidFill>
+          <a:ln>
+            <a:noFill/>
+          </a:ln>
+          <a:effectLst>
+            <a:outerShdw blurRad="228600" dist="50800" dir="5400000" rotWithShape="0">
+              <a:srgbClr val="1B2A4A">
+                <a:alpha val="22000"/>
+              </a:srgbClr>
+            </a:outerShdw>
+          </a:effectLst>
+        </p:spPr>
+        <p:style>
+          <a:lnRef idx="2">
+            <a:schemeClr val="accent1">
+              <a:shade val="50000"/>
+            </a:schemeClr>
+          </a:lnRef>
+          <a:fillRef idx="1">
+            <a:schemeClr val="accent1"/>
+          </a:fillRef>
+          <a:effectRef idx="0">
+            <a:schemeClr val="accent1"/>
+          </a:effectRef>
+          <a:fontRef idx="minor">
+            <a:schemeClr val="lt1"/>
+          </a:fontRef>
+        </p:style>
+        <p:txBody>
+          <a:bodyPr rtlCol="0" anchor="ctr"/>
+          <a:lstStyle/>
+          <a:p>
+            <a:pPr algn="ctr"/>
+            <a:endParaRPr lang="ko-KR" altLang="en-US"/>
+          </a:p>
+        </p:txBody>
+      </p:sp>
+      <p:sp>
+        <p:nvSpPr>
+          <p:cNvPr id="45" name="사각형: 둥근 모서리 44">
+            <a:extLst>
+              <a:ext uri="{FF2B5EF4-FFF2-40B4-BE49-F238E27FC236}">
+                <a16:creationId xmlns:a16="http://schemas.microsoft.com/office/drawing/2014/main" id="{D1C99C70-2C60-484C-89CD-FC823E3E9CFE}"/>
+              </a:ext>
+            </a:extLst>
+          </p:cNvPr>
+          <p:cNvSpPr/>
+          <p:nvPr/>
+        </p:nvSpPr>
+        <p:spPr>
+          <a:xfrm>
+            <a:off x="3527540" y="1217806"/>
+            <a:ext cx="2985462" cy="2881439"/>
+          </a:xfrm>
+          <a:prstGeom prst="roundRect">
+            <a:avLst>
+              <a:gd name="adj" fmla="val 5661"/>
+            </a:avLst>
+          </a:prstGeom>
+          <a:solidFill>
+            <a:schemeClr val="bg1"/>
+          </a:solidFill>
+          <a:ln>
+            <a:noFill/>
+          </a:ln>
+          <a:effectLst>
+            <a:outerShdw blurRad="228600" dist="50800" dir="5400000" rotWithShape="0">
+              <a:srgbClr val="1B2A4A">
+                <a:alpha val="22000"/>
+              </a:srgbClr>
+            </a:outerShdw>
+          </a:effectLst>
+        </p:spPr>
+        <p:style>
+          <a:lnRef idx="2">
+            <a:schemeClr val="accent1">
+              <a:shade val="50000"/>
+            </a:schemeClr>
+          </a:lnRef>
+          <a:fillRef idx="1">
+            <a:schemeClr val="accent1"/>
+          </a:fillRef>
+          <a:effectRef idx="0">
+            <a:schemeClr val="accent1"/>
+          </a:effectRef>
+          <a:fontRef idx="minor">
+            <a:schemeClr val="lt1"/>
+          </a:fontRef>
+        </p:style>
+        <p:txBody>
+          <a:bodyPr rtlCol="0" anchor="ctr"/>
+          <a:lstStyle/>
+          <a:p>
+            <a:pPr algn="ctr"/>
+            <a:endParaRPr lang="ko-KR" altLang="en-US"/>
+          </a:p>
+        </p:txBody>
+      </p:sp>
+      <p:sp>
+        <p:nvSpPr>
+          <p:cNvPr id="46" name="사각형: 둥근 모서리 45">
+            <a:extLst>
+              <a:ext uri="{FF2B5EF4-FFF2-40B4-BE49-F238E27FC236}">
+                <a16:creationId xmlns:a16="http://schemas.microsoft.com/office/drawing/2014/main" id="{12465051-9ABA-4C7D-A1B9-A3D705ADEC72}"/>
+              </a:ext>
+            </a:extLst>
+          </p:cNvPr>
+          <p:cNvSpPr/>
+          <p:nvPr/>
+        </p:nvSpPr>
+        <p:spPr>
+          <a:xfrm>
+            <a:off x="6713611" y="1217806"/>
+            <a:ext cx="2985462" cy="2881439"/>
+          </a:xfrm>
+          <a:prstGeom prst="roundRect">
+            <a:avLst>
+              <a:gd name="adj" fmla="val 5661"/>
+            </a:avLst>
+          </a:prstGeom>
+          <a:solidFill>
+            <a:schemeClr val="bg1"/>
+          </a:solidFill>
+          <a:ln>
+            <a:noFill/>
+          </a:ln>
+          <a:effectLst>
+            <a:outerShdw blurRad="228600" dist="50800" dir="5400000" rotWithShape="0">
+              <a:srgbClr val="1B2A4A">
+                <a:alpha val="22000"/>
+              </a:srgbClr>
+            </a:outerShdw>
+          </a:effectLst>
+        </p:spPr>
+        <p:style>
+          <a:lnRef idx="2">
+            <a:schemeClr val="accent1">
+              <a:shade val="50000"/>
+            </a:schemeClr>
+          </a:lnRef>
+          <a:fillRef idx="1">
+            <a:schemeClr val="accent1"/>
+          </a:fillRef>
+          <a:effectRef idx="0">
+            <a:schemeClr val="accent1"/>
+          </a:effectRef>
+          <a:fontRef idx="minor">
+            <a:schemeClr val="lt1"/>
+          </a:fontRef>
+        </p:style>
+        <p:txBody>
+          <a:bodyPr rtlCol="0" anchor="ctr"/>
+          <a:lstStyle/>
+          <a:p>
+            <a:pPr algn="ctr"/>
+            <a:endParaRPr lang="ko-KR" altLang="en-US"/>
+          </a:p>
+        </p:txBody>
+      </p:sp>
+      <p:sp>
+        <p:nvSpPr>
+          <p:cNvPr id="12" name="TextBox 11">
+            <a:extLst>
+              <a:ext uri="{FF2B5EF4-FFF2-40B4-BE49-F238E27FC236}">
+                <a16:creationId xmlns:a16="http://schemas.microsoft.com/office/drawing/2014/main" id="{1FA75749-6157-40BB-A74E-394D6C347B77}"/>
+              </a:ext>
+            </a:extLst>
+          </p:cNvPr>
+          <p:cNvSpPr txBox="1"/>
+          <p:nvPr/>
+        </p:nvSpPr>
+        <p:spPr>
+          <a:xfrm>
+            <a:off x="562773" y="1335924"/>
+            <a:ext cx="2520908" cy="323165"/>
+          </a:xfrm>
+          <a:prstGeom prst="rect">
+            <a:avLst/>
+          </a:prstGeom>
+          <a:noFill/>
+        </p:spPr>
+        <p:txBody>
+          <a:bodyPr wrap="square" rtlCol="0">
+            <a:spAutoFit/>
+          </a:bodyPr>
+          <a:lstStyle/>
+          <a:p>
+            <a:pPr algn="ctr"/>
+            <a:r>
+              <a:rPr lang="ko-KR" altLang="en-US" sz="1500" b="1"/>
+              <a:t>회사 업무</a:t>
+            </a:r>
+          </a:p>
+        </p:txBody>
+      </p:sp>
+      <p:cxnSp>
+        <p:nvCxnSpPr>
+          <p:cNvPr id="14" name="직선 연결선 13">
+            <a:extLst>
+              <a:ext uri="{FF2B5EF4-FFF2-40B4-BE49-F238E27FC236}">
+                <a16:creationId xmlns:a16="http://schemas.microsoft.com/office/drawing/2014/main" id="{3336D8E1-00F3-4635-8A14-6290ADD2EACF}"/>
+              </a:ext>
+            </a:extLst>
+          </p:cNvPr>
+          <p:cNvCxnSpPr>
+            <a:cxnSpLocks/>
+          </p:cNvCxnSpPr>
+          <p:nvPr/>
+        </p:nvCxnSpPr>
+        <p:spPr>
+          <a:xfrm>
+            <a:off x="470559" y="1739203"/>
+            <a:ext cx="2705337" cy="0"/>
+          </a:xfrm>
+          <a:prstGeom prst="line">
+            <a:avLst/>
+          </a:prstGeom>
+        </p:spPr>
+        <p:style>
+          <a:lnRef idx="1">
+            <a:schemeClr val="accent1"/>
+          </a:lnRef>
+          <a:fillRef idx="0">
+            <a:schemeClr val="accent1"/>
+          </a:fillRef>
+          <a:effectRef idx="0">
+            <a:schemeClr val="accent1"/>
+          </a:effectRef>
+          <a:fontRef idx="minor">
+            <a:schemeClr val="tx1"/>
+          </a:fontRef>
+        </p:style>
+      </p:cxnSp>
+      <p:sp>
+        <p:nvSpPr>
+          <p:cNvPr id="50" name="TextBox 49">
+            <a:extLst>
+              <a:ext uri="{FF2B5EF4-FFF2-40B4-BE49-F238E27FC236}">
+                <a16:creationId xmlns:a16="http://schemas.microsoft.com/office/drawing/2014/main" id="{6EBBEF99-4056-4026-9C0A-5F83DA10A174}"/>
+              </a:ext>
+            </a:extLst>
+          </p:cNvPr>
+          <p:cNvSpPr txBox="1"/>
+          <p:nvPr/>
+        </p:nvSpPr>
+        <p:spPr>
+          <a:xfrm>
+            <a:off x="3779919" y="1335924"/>
+            <a:ext cx="2520908" cy="323165"/>
+          </a:xfrm>
+          <a:prstGeom prst="rect">
+            <a:avLst/>
+          </a:prstGeom>
+          <a:noFill/>
+        </p:spPr>
+        <p:txBody>
+          <a:bodyPr wrap="square" rtlCol="0">
+            <a:spAutoFit/>
+          </a:bodyPr>
+          <a:lstStyle/>
+          <a:p>
+            <a:pPr algn="ctr"/>
+            <a:r>
+              <a:rPr lang="ko-KR" altLang="en-US" sz="1500" b="1"/>
+              <a:t>문제점</a:t>
+            </a:r>
+          </a:p>
+        </p:txBody>
+      </p:sp>
+      <p:cxnSp>
+        <p:nvCxnSpPr>
+          <p:cNvPr id="52" name="직선 연결선 51">
+            <a:extLst>
+              <a:ext uri="{FF2B5EF4-FFF2-40B4-BE49-F238E27FC236}">
+                <a16:creationId xmlns:a16="http://schemas.microsoft.com/office/drawing/2014/main" id="{6F79F0D2-2158-4094-8A1A-0BCE7B519E87}"/>
+              </a:ext>
+            </a:extLst>
+          </p:cNvPr>
+          <p:cNvCxnSpPr>
+            <a:cxnSpLocks/>
+          </p:cNvCxnSpPr>
+          <p:nvPr/>
+        </p:nvCxnSpPr>
+        <p:spPr>
+          <a:xfrm>
+            <a:off x="3687705" y="1739203"/>
+            <a:ext cx="2705337" cy="0"/>
+          </a:xfrm>
+          <a:prstGeom prst="line">
+            <a:avLst/>
+          </a:prstGeom>
+        </p:spPr>
+        <p:style>
+          <a:lnRef idx="1">
+            <a:schemeClr val="accent1"/>
+          </a:lnRef>
+          <a:fillRef idx="0">
+            <a:schemeClr val="accent1"/>
+          </a:fillRef>
+          <a:effectRef idx="0">
+            <a:schemeClr val="accent1"/>
+          </a:effectRef>
+          <a:fontRef idx="minor">
+            <a:schemeClr val="tx1"/>
+          </a:fontRef>
+        </p:style>
+      </p:cxnSp>
+      <p:sp>
+        <p:nvSpPr>
+          <p:cNvPr id="57" name="TextBox 56">
+            <a:extLst>
+              <a:ext uri="{FF2B5EF4-FFF2-40B4-BE49-F238E27FC236}">
+                <a16:creationId xmlns:a16="http://schemas.microsoft.com/office/drawing/2014/main" id="{C584307B-0BB5-4521-B4EE-F153D3B5F5AE}"/>
+              </a:ext>
+            </a:extLst>
+          </p:cNvPr>
+          <p:cNvSpPr txBox="1"/>
+          <p:nvPr/>
+        </p:nvSpPr>
+        <p:spPr>
+          <a:xfrm>
+            <a:off x="6945888" y="1335924"/>
+            <a:ext cx="2520908" cy="323165"/>
+          </a:xfrm>
+          <a:prstGeom prst="rect">
+            <a:avLst/>
+          </a:prstGeom>
+          <a:noFill/>
+        </p:spPr>
+        <p:txBody>
+          <a:bodyPr wrap="square" rtlCol="0">
+            <a:spAutoFit/>
+          </a:bodyPr>
+          <a:lstStyle/>
+          <a:p>
+            <a:pPr algn="ctr"/>
+            <a:r>
+              <a:rPr lang="ko-KR" altLang="en-US" sz="1500" b="1"/>
+              <a:t>개선 방안</a:t>
+            </a:r>
+          </a:p>
+        </p:txBody>
+      </p:sp>
+      <p:cxnSp>
+        <p:nvCxnSpPr>
+          <p:cNvPr id="60" name="직선 연결선 59">
+            <a:extLst>
+              <a:ext uri="{FF2B5EF4-FFF2-40B4-BE49-F238E27FC236}">
+                <a16:creationId xmlns:a16="http://schemas.microsoft.com/office/drawing/2014/main" id="{D9796B37-8472-4D2F-A913-646D47B51A80}"/>
+              </a:ext>
+            </a:extLst>
+          </p:cNvPr>
+          <p:cNvCxnSpPr>
+            <a:cxnSpLocks/>
+          </p:cNvCxnSpPr>
+          <p:nvPr/>
+        </p:nvCxnSpPr>
+        <p:spPr>
+          <a:xfrm>
+            <a:off x="6853674" y="1739203"/>
+            <a:ext cx="2705337" cy="0"/>
+          </a:xfrm>
+          <a:prstGeom prst="line">
+            <a:avLst/>
+          </a:prstGeom>
+        </p:spPr>
+        <p:style>
+          <a:lnRef idx="1">
+            <a:schemeClr val="accent1"/>
+          </a:lnRef>
+          <a:fillRef idx="0">
+            <a:schemeClr val="accent1"/>
+          </a:fillRef>
+          <a:effectRef idx="0">
+            <a:schemeClr val="accent1"/>
+          </a:effectRef>
+          <a:fontRef idx="minor">
+            <a:schemeClr val="tx1"/>
+          </a:fontRef>
+        </p:style>
+      </p:cxnSp>
+      <p:sp>
+        <p:nvSpPr>
+          <p:cNvPr id="39" name="TextBox 38">
+            <a:extLst>
+              <a:ext uri="{FF2B5EF4-FFF2-40B4-BE49-F238E27FC236}">
+                <a16:creationId xmlns:a16="http://schemas.microsoft.com/office/drawing/2014/main" id="{DFE79726-461E-4F9B-A835-7A3125F4632A}"/>
+              </a:ext>
+            </a:extLst>
+          </p:cNvPr>
+          <p:cNvSpPr txBox="1"/>
+          <p:nvPr/>
+        </p:nvSpPr>
+        <p:spPr>
+          <a:xfrm>
+            <a:off x="349148" y="2995774"/>
+            <a:ext cx="2985461" cy="948978"/>
+          </a:xfrm>
+          <a:prstGeom prst="rect">
+            <a:avLst/>
+          </a:prstGeom>
+          <a:noFill/>
+        </p:spPr>
+        <p:txBody>
+          <a:bodyPr wrap="square" rtlCol="0">
+            <a:spAutoFit/>
+          </a:bodyPr>
+          <a:lstStyle/>
+          <a:p>
+            <a:pPr marL="90488" indent="-90488">
+              <a:spcBef>
+                <a:spcPts val="500"/>
+              </a:spcBef>
+              <a:spcAft>
+                <a:spcPts val="500"/>
+              </a:spcAft>
+              <a:buClr>
+                <a:schemeClr val="accent1">
+                  <a:lumMod val="60000"/>
+                  <a:lumOff val="40000"/>
+                </a:schemeClr>
+              </a:buClr>
+              <a:buFont typeface="Wingdings" panose="05000000000000000000" pitchFamily="2" charset="2"/>
+              <a:buChar char="§"/>
+            </a:pPr>
+            <a:r>
+              <a:rPr lang="ko-KR" altLang="en-US" sz="1300"/>
+              <a:t> 정해진 프로세스와 절차에 따라 처리</a:t>
+            </a:r>
+            <a:endParaRPr lang="en-US" altLang="ko-KR" sz="1300"/>
+          </a:p>
+          <a:p>
+            <a:pPr marL="90488" indent="-90488">
+              <a:spcBef>
+                <a:spcPts val="500"/>
+              </a:spcBef>
+              <a:spcAft>
+                <a:spcPts val="500"/>
+              </a:spcAft>
+              <a:buClr>
+                <a:schemeClr val="accent1">
+                  <a:lumMod val="60000"/>
+                  <a:lumOff val="40000"/>
+                </a:schemeClr>
+              </a:buClr>
+              <a:buFont typeface="Wingdings" panose="05000000000000000000" pitchFamily="2" charset="2"/>
+              <a:buChar char="§"/>
+            </a:pPr>
+            <a:r>
+              <a:rPr lang="en-US" altLang="ko-KR" sz="1300"/>
+              <a:t> </a:t>
+            </a:r>
+            <a:r>
+              <a:rPr lang="ko-KR" altLang="en-US" sz="1300"/>
+              <a:t>담당자가 바뀌어도 필수 절차 준수</a:t>
+            </a:r>
+            <a:endParaRPr lang="en-US" altLang="ko-KR" sz="1300"/>
+          </a:p>
+          <a:p>
+            <a:pPr marL="90488" indent="-90488">
+              <a:spcBef>
+                <a:spcPts val="500"/>
+              </a:spcBef>
+              <a:spcAft>
+                <a:spcPts val="500"/>
+              </a:spcAft>
+              <a:buClr>
+                <a:schemeClr val="accent1">
+                  <a:lumMod val="60000"/>
+                  <a:lumOff val="40000"/>
+                </a:schemeClr>
+              </a:buClr>
+              <a:buFont typeface="Wingdings" panose="05000000000000000000" pitchFamily="2" charset="2"/>
+              <a:buChar char="§"/>
+            </a:pPr>
+            <a:r>
+              <a:rPr lang="ko-KR" altLang="en-US" sz="1300"/>
+              <a:t> 일관된 결과물 확보 필요</a:t>
+            </a:r>
+          </a:p>
+        </p:txBody>
+      </p:sp>
+      <p:pic>
+        <p:nvPicPr>
+          <p:cNvPr id="13" name="그래픽 12" descr="체크리스트 단색으로 채워진">
+            <a:extLst>
+              <a:ext uri="{FF2B5EF4-FFF2-40B4-BE49-F238E27FC236}">
+                <a16:creationId xmlns:a16="http://schemas.microsoft.com/office/drawing/2014/main" id="{0135F75B-0F42-4B60-AC08-FD2CF59A281B}"/>
+              </a:ext>
+            </a:extLst>
+          </p:cNvPr>
+          <p:cNvPicPr>
+            <a:picLocks noChangeAspect="1"/>
+          </p:cNvPicPr>
+          <p:nvPr/>
+        </p:nvPicPr>
+        <p:blipFill>
+          <a:blip r:embed="rId12">
+            <a:extLst>
+              <a:ext uri="{28A0092B-C50C-407E-A947-70E740481C1C}">
+                <a14:useLocalDpi xmlns:a14="http://schemas.microsoft.com/office/drawing/2010/main" val="0"/>
+              </a:ext>
+            </a:extLst>
+          </a:blip>
+          <a:stretch>
+            <a:fillRect/>
+          </a:stretch>
+        </p:blipFill>
+        <p:spPr>
+          <a:xfrm>
+            <a:off x="1475519" y="1959127"/>
+            <a:ext cx="755703" cy="755703"/>
+          </a:xfrm>
+          <a:prstGeom prst="rect">
+            <a:avLst/>
+          </a:prstGeom>
+        </p:spPr>
+      </p:pic>
+      <p:sp>
+        <p:nvSpPr>
+          <p:cNvPr id="43" name="TextBox 42">
+            <a:extLst>
+              <a:ext uri="{FF2B5EF4-FFF2-40B4-BE49-F238E27FC236}">
+                <a16:creationId xmlns:a16="http://schemas.microsoft.com/office/drawing/2014/main" id="{80CE7C00-4BD4-4C02-BA3C-66110498AE87}"/>
+              </a:ext>
+            </a:extLst>
+          </p:cNvPr>
+          <p:cNvSpPr txBox="1"/>
+          <p:nvPr/>
+        </p:nvSpPr>
+        <p:spPr>
+          <a:xfrm>
+            <a:off x="3527541" y="2995774"/>
+            <a:ext cx="3114419" cy="948978"/>
+          </a:xfrm>
+          <a:prstGeom prst="rect">
+            <a:avLst/>
+          </a:prstGeom>
+          <a:noFill/>
+        </p:spPr>
+        <p:txBody>
+          <a:bodyPr wrap="square" rtlCol="0">
+            <a:spAutoFit/>
+          </a:bodyPr>
+          <a:lstStyle/>
+          <a:p>
+            <a:pPr marL="90488" indent="-90488">
+              <a:spcBef>
+                <a:spcPts val="500"/>
+              </a:spcBef>
+              <a:spcAft>
+                <a:spcPts val="500"/>
+              </a:spcAft>
+              <a:buClr>
+                <a:schemeClr val="accent1">
+                  <a:lumMod val="60000"/>
+                  <a:lumOff val="40000"/>
+                </a:schemeClr>
+              </a:buClr>
+              <a:buFont typeface="Wingdings" panose="05000000000000000000" pitchFamily="2" charset="2"/>
+              <a:buChar char="§"/>
+            </a:pPr>
+            <a:r>
+              <a:rPr lang="ko-KR" altLang="en-US" sz="1300"/>
+              <a:t> </a:t>
+            </a:r>
+            <a:r>
+              <a:rPr lang="ko-KR" altLang="en-US" sz="1300" spc="-40"/>
+              <a:t>필요한 절차와 지침을 찾는데 시간 소요</a:t>
+            </a:r>
+            <a:endParaRPr lang="en-US" altLang="ko-KR" sz="1300" spc="-40"/>
+          </a:p>
+          <a:p>
+            <a:pPr marL="90488" indent="-90488">
+              <a:spcBef>
+                <a:spcPts val="500"/>
+              </a:spcBef>
+              <a:spcAft>
+                <a:spcPts val="500"/>
+              </a:spcAft>
+              <a:buClr>
+                <a:schemeClr val="accent1">
+                  <a:lumMod val="60000"/>
+                  <a:lumOff val="40000"/>
+                </a:schemeClr>
+              </a:buClr>
+              <a:buFont typeface="Wingdings" panose="05000000000000000000" pitchFamily="2" charset="2"/>
+              <a:buChar char="§"/>
+            </a:pPr>
+            <a:r>
+              <a:rPr lang="en-US" altLang="ko-KR" sz="1300" spc="-40"/>
+              <a:t> </a:t>
+            </a:r>
+            <a:r>
+              <a:rPr lang="ko-KR" altLang="en-US" sz="1300"/>
+              <a:t>담당자마다 처리 방식이 다름</a:t>
+            </a:r>
+            <a:endParaRPr lang="en-US" altLang="ko-KR" sz="1300"/>
+          </a:p>
+          <a:p>
+            <a:pPr marL="90488" indent="-90488">
+              <a:spcBef>
+                <a:spcPts val="500"/>
+              </a:spcBef>
+              <a:spcAft>
+                <a:spcPts val="500"/>
+              </a:spcAft>
+              <a:buClr>
+                <a:schemeClr val="accent1">
+                  <a:lumMod val="60000"/>
+                  <a:lumOff val="40000"/>
+                </a:schemeClr>
+              </a:buClr>
+              <a:buFont typeface="Wingdings" panose="05000000000000000000" pitchFamily="2" charset="2"/>
+              <a:buChar char="§"/>
+            </a:pPr>
+            <a:r>
+              <a:rPr lang="ko-KR" altLang="en-US" sz="1300"/>
+              <a:t> 업무 누락과 편차 발생</a:t>
+            </a:r>
+          </a:p>
+        </p:txBody>
+      </p:sp>
+      <p:pic>
+        <p:nvPicPr>
+          <p:cNvPr id="16" name="그래픽 15" descr="물음표 단색으로 채워진">
+            <a:extLst>
+              <a:ext uri="{FF2B5EF4-FFF2-40B4-BE49-F238E27FC236}">
+                <a16:creationId xmlns:a16="http://schemas.microsoft.com/office/drawing/2014/main" id="{37F2DC6D-0D3D-47E1-B656-D277CD737936}"/>
+              </a:ext>
+            </a:extLst>
+          </p:cNvPr>
+          <p:cNvPicPr>
+            <a:picLocks noChangeAspect="1"/>
+          </p:cNvPicPr>
+          <p:nvPr/>
+        </p:nvPicPr>
+        <p:blipFill>
+          <a:blip r:embed="rId13">
+            <a:extLst>
+              <a:ext uri="{28A0092B-C50C-407E-A947-70E740481C1C}">
+                <a14:useLocalDpi xmlns:a14="http://schemas.microsoft.com/office/drawing/2010/main" val="0"/>
+              </a:ext>
+            </a:extLst>
+          </a:blip>
+          <a:stretch>
+            <a:fillRect/>
+          </a:stretch>
+        </p:blipFill>
+        <p:spPr>
+          <a:xfrm>
+            <a:off x="4597946" y="1959127"/>
+            <a:ext cx="755703" cy="755703"/>
+          </a:xfrm>
+          <a:prstGeom prst="rect">
+            <a:avLst/>
+          </a:prstGeom>
+        </p:spPr>
+      </p:pic>
+      <p:sp>
+        <p:nvSpPr>
+          <p:cNvPr id="51" name="TextBox 50">
+            <a:extLst>
+              <a:ext uri="{FF2B5EF4-FFF2-40B4-BE49-F238E27FC236}">
+                <a16:creationId xmlns:a16="http://schemas.microsoft.com/office/drawing/2014/main" id="{BFA5A8A9-28C1-465A-8FA8-791A2996B35D}"/>
+              </a:ext>
+            </a:extLst>
+          </p:cNvPr>
+          <p:cNvSpPr txBox="1"/>
+          <p:nvPr/>
+        </p:nvSpPr>
+        <p:spPr>
+          <a:xfrm>
+            <a:off x="6713612" y="2995774"/>
+            <a:ext cx="2985461" cy="820738"/>
+          </a:xfrm>
+          <a:prstGeom prst="rect">
+            <a:avLst/>
+          </a:prstGeom>
+          <a:noFill/>
+        </p:spPr>
+        <p:txBody>
+          <a:bodyPr wrap="square" rtlCol="0">
+            <a:spAutoFit/>
+          </a:bodyPr>
+          <a:lstStyle/>
+          <a:p>
+            <a:pPr marL="90488" indent="-90488">
+              <a:spcBef>
+                <a:spcPts val="500"/>
+              </a:spcBef>
+              <a:buClr>
+                <a:schemeClr val="accent1">
+                  <a:lumMod val="60000"/>
+                  <a:lumOff val="40000"/>
+                </a:schemeClr>
+              </a:buClr>
+              <a:buFont typeface="Wingdings" panose="05000000000000000000" pitchFamily="2" charset="2"/>
+              <a:buChar char="§"/>
+            </a:pPr>
+            <a:r>
+              <a:rPr lang="ko-KR" altLang="en-US" sz="1300"/>
+              <a:t> </a:t>
+            </a:r>
+            <a:r>
+              <a:rPr lang="ko-KR" altLang="en-US" sz="1300" spc="-40">
+                <a:solidFill>
+                  <a:prstClr val="black"/>
+                </a:solidFill>
+                <a:latin typeface="맑은 고딕"/>
+                <a:ea typeface="맑은 고딕" panose="020B0503020000020004" pitchFamily="50" charset="-127"/>
+                <a:sym typeface="Wingdings" pitchFamily="2" charset="2"/>
+              </a:rPr>
+              <a:t>수행하려는 업무를 </a:t>
+            </a:r>
+            <a:r>
+              <a:rPr lang="ko-KR" altLang="en-US" sz="1300"/>
+              <a:t>입력하면 </a:t>
+            </a:r>
+            <a:endParaRPr lang="en-US" altLang="ko-KR" sz="1300"/>
+          </a:p>
+          <a:p>
+            <a:pPr>
+              <a:spcBef>
+                <a:spcPts val="500"/>
+              </a:spcBef>
+              <a:buClr>
+                <a:schemeClr val="accent1">
+                  <a:lumMod val="60000"/>
+                  <a:lumOff val="40000"/>
+                </a:schemeClr>
+              </a:buClr>
+            </a:pPr>
+            <a:r>
+              <a:rPr lang="en-US" altLang="ko-KR" sz="1300"/>
+              <a:t>   </a:t>
+            </a:r>
+            <a:r>
+              <a:rPr lang="ko-KR" altLang="en-US" sz="1300" b="1"/>
+              <a:t>처리 절차와 지침을 쉽게 안내하는</a:t>
+            </a:r>
+            <a:endParaRPr lang="en-US" altLang="ko-KR" sz="1300" b="1"/>
+          </a:p>
+          <a:p>
+            <a:pPr>
+              <a:spcBef>
+                <a:spcPts val="500"/>
+              </a:spcBef>
+              <a:buClr>
+                <a:schemeClr val="accent1">
+                  <a:lumMod val="60000"/>
+                  <a:lumOff val="40000"/>
+                </a:schemeClr>
+              </a:buClr>
+            </a:pPr>
+            <a:r>
+              <a:rPr lang="en-US" altLang="ko-KR" sz="1300" b="1"/>
+              <a:t>  </a:t>
+            </a:r>
+            <a:r>
+              <a:rPr lang="ko-KR" altLang="en-US" sz="1300" b="1"/>
+              <a:t> </a:t>
+            </a:r>
+            <a:r>
+              <a:rPr lang="en-US" altLang="ko-KR" sz="1300" b="1"/>
+              <a:t>『</a:t>
+            </a:r>
+            <a:r>
+              <a:rPr lang="ko-KR" altLang="en-US" sz="1300" b="1"/>
+              <a:t>업무 지침 네비게이터</a:t>
+            </a:r>
+            <a:r>
+              <a:rPr lang="en-US" altLang="ko-KR" sz="1300" b="1"/>
+              <a:t>』 </a:t>
+            </a:r>
+            <a:r>
+              <a:rPr lang="ko-KR" altLang="en-US" sz="1300" b="1"/>
+              <a:t>구축</a:t>
+            </a:r>
+            <a:endParaRPr lang="ko-KR" altLang="en-US" sz="1300"/>
+          </a:p>
+        </p:txBody>
+      </p:sp>
+      <p:pic>
+        <p:nvPicPr>
+          <p:cNvPr id="34" name="그림 33">
+            <a:extLst>
+              <a:ext uri="{FF2B5EF4-FFF2-40B4-BE49-F238E27FC236}">
+                <a16:creationId xmlns:a16="http://schemas.microsoft.com/office/drawing/2014/main" id="{9D207778-395A-407B-BF36-D2E69C775692}"/>
+              </a:ext>
+            </a:extLst>
+          </p:cNvPr>
+          <p:cNvPicPr>
+            <a:picLocks noChangeAspect="1"/>
+          </p:cNvPicPr>
+          <p:nvPr/>
+        </p:nvPicPr>
+        <p:blipFill>
+          <a:blip r:embed="rId14">
+            <a:extLst>
+              <a:ext uri="{28A0092B-C50C-407E-A947-70E740481C1C}">
+                <a14:useLocalDpi xmlns:a14="http://schemas.microsoft.com/office/drawing/2010/main" val="0"/>
+              </a:ext>
+            </a:extLst>
+          </a:blip>
+          <a:stretch>
+            <a:fillRect/>
+          </a:stretch>
+        </p:blipFill>
+        <p:spPr>
+          <a:xfrm>
+            <a:off x="7256630" y="1814756"/>
+            <a:ext cx="1899424" cy="1068994"/>
+          </a:xfrm>
+          <a:prstGeom prst="rect">
+            <a:avLst/>
+          </a:prstGeom>
+        </p:spPr>
+      </p:pic>
+      <p:sp>
+        <p:nvSpPr>
+          <p:cNvPr id="56" name="TextBox 55">
+            <a:extLst>
+              <a:ext uri="{FF2B5EF4-FFF2-40B4-BE49-F238E27FC236}">
+                <a16:creationId xmlns:a16="http://schemas.microsoft.com/office/drawing/2014/main" id="{84379734-9EBD-4B03-9465-8E1A8B1D887B}"/>
+              </a:ext>
+            </a:extLst>
+          </p:cNvPr>
+          <p:cNvSpPr txBox="1"/>
+          <p:nvPr/>
+        </p:nvSpPr>
+        <p:spPr>
+          <a:xfrm>
+            <a:off x="8792918" y="283028"/>
+            <a:ext cx="1091310" cy="307777"/>
+          </a:xfrm>
+          <a:prstGeom prst="rect">
+            <a:avLst/>
+          </a:prstGeom>
+          <a:noFill/>
+        </p:spPr>
+        <p:txBody>
+          <a:bodyPr wrap="square" rtlCol="0">
+            <a:spAutoFit/>
+          </a:bodyPr>
+          <a:lstStyle/>
+          <a:p>
+            <a:pPr algn="r"/>
+            <a:r>
+              <a:rPr lang="en-US" altLang="ko-KR" sz="1400" b="1">
+                <a:solidFill>
+                  <a:schemeClr val="bg1"/>
+                </a:solidFill>
+                <a:latin typeface="+mj-ea"/>
+                <a:ea typeface="+mj-ea"/>
+              </a:rPr>
+              <a:t>(1/6)</a:t>
+            </a:r>
+            <a:endParaRPr lang="ko-KR" altLang="en-US" sz="1400" b="1">
+              <a:solidFill>
+                <a:schemeClr val="bg1"/>
+              </a:solidFill>
+              <a:latin typeface="+mj-ea"/>
+              <a:ea typeface="+mj-ea"/>
+            </a:endParaRPr>
           </a:p>
         </p:txBody>
       </p:sp>
       <p:grpSp>
         <p:nvGrpSpPr>
-          <p:cNvPr id="42" name="그룹 41">
-            <a:extLst>
-              <a:ext uri="{FF2B5EF4-FFF2-40B4-BE49-F238E27FC236}">
-                <a16:creationId xmlns:a16="http://schemas.microsoft.com/office/drawing/2014/main" id="{D707C160-1EC8-44FC-B4D0-7B733975BF70}"/>
+          <p:cNvPr id="49" name="그룹 48">
+            <a:extLst>
+              <a:ext uri="{FF2B5EF4-FFF2-40B4-BE49-F238E27FC236}">
+                <a16:creationId xmlns:a16="http://schemas.microsoft.com/office/drawing/2014/main" id="{DB273691-F70E-4DA3-8FC4-27B912BBBBB3}"/>
               </a:ext>
             </a:extLst>
           </p:cNvPr>
@@ -5305,7 +6347,7 @@
         </p:nvGrpSpPr>
         <p:grpSpPr>
           <a:xfrm>
-            <a:off x="408628" y="6025044"/>
+            <a:off x="325500" y="6138454"/>
             <a:ext cx="511817" cy="431452"/>
             <a:chOff x="-895525" y="3274733"/>
             <a:chExt cx="619300" cy="474597"/>
@@ -5313,10 +6355,10 @@
         </p:grpSpPr>
         <p:sp>
           <p:nvSpPr>
-            <p:cNvPr id="40" name="타원 39">
+            <p:cNvPr id="53" name="타원 52">
               <a:extLst>
                 <a:ext uri="{FF2B5EF4-FFF2-40B4-BE49-F238E27FC236}">
-                  <a16:creationId xmlns:a16="http://schemas.microsoft.com/office/drawing/2014/main" id="{DA20131F-F70E-4A56-981E-03309AF0D12C}"/>
+                  <a16:creationId xmlns:a16="http://schemas.microsoft.com/office/drawing/2014/main" id="{1FF74794-DBB2-42EC-9656-063B13795A7D}"/>
                 </a:ext>
               </a:extLst>
             </p:cNvPr>
@@ -5362,10 +6404,10 @@
         </p:sp>
         <p:sp>
           <p:nvSpPr>
-            <p:cNvPr id="41" name="화살표: 오른쪽 40">
+            <p:cNvPr id="54" name="화살표: 오른쪽 53">
               <a:extLst>
                 <a:ext uri="{FF2B5EF4-FFF2-40B4-BE49-F238E27FC236}">
-                  <a16:creationId xmlns:a16="http://schemas.microsoft.com/office/drawing/2014/main" id="{82487A50-08B9-4EF0-9A7E-A9A654CF1493}"/>
+                  <a16:creationId xmlns:a16="http://schemas.microsoft.com/office/drawing/2014/main" id="{8CA3DC86-BB4D-45F2-B178-FE7EBBAA57FA}"/>
                 </a:ext>
               </a:extLst>
             </p:cNvPr>
@@ -5421,1049 +6463,6 @@
           </p:txBody>
         </p:sp>
       </p:grpSp>
-      <p:sp>
-        <p:nvSpPr>
-          <p:cNvPr id="62" name="사각형: 둥근 모서리 61">
-            <a:extLst>
-              <a:ext uri="{FF2B5EF4-FFF2-40B4-BE49-F238E27FC236}">
-                <a16:creationId xmlns:a16="http://schemas.microsoft.com/office/drawing/2014/main" id="{BFB32620-BF19-4B11-B076-46885445DCD3}"/>
-              </a:ext>
-            </a:extLst>
-          </p:cNvPr>
-          <p:cNvSpPr>
-            <a:spLocks noGrp="1"/>
-          </p:cNvSpPr>
-          <p:nvPr/>
-        </p:nvSpPr>
-        <p:spPr>
-          <a:xfrm>
-            <a:off x="330495" y="4817740"/>
-            <a:ext cx="9409457" cy="999163"/>
-          </a:xfrm>
-          <a:prstGeom prst="roundRect">
-            <a:avLst>
-              <a:gd name="adj" fmla="val 5139"/>
-            </a:avLst>
-          </a:prstGeom>
-          <a:noFill/>
-          <a:ln w="12700">
-            <a:solidFill>
-              <a:schemeClr val="bg1">
-                <a:lumMod val="75000"/>
-              </a:schemeClr>
-            </a:solidFill>
-            <a:prstDash val="solid"/>
-          </a:ln>
-        </p:spPr>
-        <p:txBody>
-          <a:bodyPr anchor="ctr" anchorCtr="0"/>
-          <a:lstStyle/>
-          <a:p>
-            <a:pPr algn="ctr"/>
-            <a:endParaRPr lang="ko-KR" altLang="en-US" sz="1400" b="1"/>
-          </a:p>
-        </p:txBody>
-      </p:sp>
-      <p:sp>
-        <p:nvSpPr>
-          <p:cNvPr id="64" name="이등변 삼각형 63">
-            <a:extLst>
-              <a:ext uri="{FF2B5EF4-FFF2-40B4-BE49-F238E27FC236}">
-                <a16:creationId xmlns:a16="http://schemas.microsoft.com/office/drawing/2014/main" id="{CBE0F7A1-7FBC-4044-82C1-997A319E3071}"/>
-              </a:ext>
-            </a:extLst>
-          </p:cNvPr>
-          <p:cNvSpPr/>
-          <p:nvPr/>
-        </p:nvSpPr>
-        <p:spPr>
-          <a:xfrm rot="5400000">
-            <a:off x="2699726" y="5328339"/>
-            <a:ext cx="166088" cy="120792"/>
-          </a:xfrm>
-          <a:prstGeom prst="triangle">
-            <a:avLst/>
-          </a:prstGeom>
-          <a:solidFill>
-            <a:schemeClr val="bg1">
-              <a:lumMod val="75000"/>
-            </a:schemeClr>
-          </a:solidFill>
-          <a:ln>
-            <a:noFill/>
-          </a:ln>
-        </p:spPr>
-        <p:style>
-          <a:lnRef idx="2">
-            <a:schemeClr val="accent1">
-              <a:shade val="50000"/>
-            </a:schemeClr>
-          </a:lnRef>
-          <a:fillRef idx="1">
-            <a:schemeClr val="accent1"/>
-          </a:fillRef>
-          <a:effectRef idx="0">
-            <a:schemeClr val="accent1"/>
-          </a:effectRef>
-          <a:fontRef idx="minor">
-            <a:schemeClr val="lt1"/>
-          </a:fontRef>
-        </p:style>
-        <p:txBody>
-          <a:bodyPr rtlCol="0" anchor="ctr"/>
-          <a:lstStyle/>
-          <a:p>
-            <a:pPr algn="ctr"/>
-            <a:endParaRPr lang="ko-KR" altLang="en-US"/>
-          </a:p>
-        </p:txBody>
-      </p:sp>
-      <p:sp>
-        <p:nvSpPr>
-          <p:cNvPr id="65" name="이등변 삼각형 64">
-            <a:extLst>
-              <a:ext uri="{FF2B5EF4-FFF2-40B4-BE49-F238E27FC236}">
-                <a16:creationId xmlns:a16="http://schemas.microsoft.com/office/drawing/2014/main" id="{2EDC7E73-7337-42B2-928F-D70EB47D31EC}"/>
-              </a:ext>
-            </a:extLst>
-          </p:cNvPr>
-          <p:cNvSpPr/>
-          <p:nvPr/>
-        </p:nvSpPr>
-        <p:spPr>
-          <a:xfrm rot="5400000">
-            <a:off x="7072446" y="5330017"/>
-            <a:ext cx="166088" cy="120792"/>
-          </a:xfrm>
-          <a:prstGeom prst="triangle">
-            <a:avLst/>
-          </a:prstGeom>
-          <a:solidFill>
-            <a:schemeClr val="bg1">
-              <a:lumMod val="75000"/>
-            </a:schemeClr>
-          </a:solidFill>
-          <a:ln>
-            <a:noFill/>
-          </a:ln>
-        </p:spPr>
-        <p:style>
-          <a:lnRef idx="2">
-            <a:schemeClr val="accent1">
-              <a:shade val="50000"/>
-            </a:schemeClr>
-          </a:lnRef>
-          <a:fillRef idx="1">
-            <a:schemeClr val="accent1"/>
-          </a:fillRef>
-          <a:effectRef idx="0">
-            <a:schemeClr val="accent1"/>
-          </a:effectRef>
-          <a:fontRef idx="minor">
-            <a:schemeClr val="lt1"/>
-          </a:fontRef>
-        </p:style>
-        <p:txBody>
-          <a:bodyPr rtlCol="0" anchor="ctr"/>
-          <a:lstStyle/>
-          <a:p>
-            <a:pPr algn="ctr"/>
-            <a:endParaRPr lang="ko-KR" altLang="en-US"/>
-          </a:p>
-        </p:txBody>
-      </p:sp>
-      <p:sp>
-        <p:nvSpPr>
-          <p:cNvPr id="3" name="사각형: 둥근 모서리 2">
-            <a:extLst>
-              <a:ext uri="{FF2B5EF4-FFF2-40B4-BE49-F238E27FC236}">
-                <a16:creationId xmlns:a16="http://schemas.microsoft.com/office/drawing/2014/main" id="{1D30FD96-B91F-4CF6-97C0-E4128ECEA73A}"/>
-              </a:ext>
-            </a:extLst>
-          </p:cNvPr>
-          <p:cNvSpPr/>
-          <p:nvPr/>
-        </p:nvSpPr>
-        <p:spPr>
-          <a:xfrm>
-            <a:off x="330495" y="1217806"/>
-            <a:ext cx="2985462" cy="2881439"/>
-          </a:xfrm>
-          <a:prstGeom prst="roundRect">
-            <a:avLst>
-              <a:gd name="adj" fmla="val 5661"/>
-            </a:avLst>
-          </a:prstGeom>
-          <a:solidFill>
-            <a:schemeClr val="bg1"/>
-          </a:solidFill>
-          <a:ln>
-            <a:noFill/>
-          </a:ln>
-          <a:effectLst>
-            <a:outerShdw blurRad="228600" dist="50800" dir="5400000" rotWithShape="0">
-              <a:srgbClr val="1B2A4A">
-                <a:alpha val="22000"/>
-              </a:srgbClr>
-            </a:outerShdw>
-          </a:effectLst>
-        </p:spPr>
-        <p:style>
-          <a:lnRef idx="2">
-            <a:schemeClr val="accent1">
-              <a:shade val="50000"/>
-            </a:schemeClr>
-          </a:lnRef>
-          <a:fillRef idx="1">
-            <a:schemeClr val="accent1"/>
-          </a:fillRef>
-          <a:effectRef idx="0">
-            <a:schemeClr val="accent1"/>
-          </a:effectRef>
-          <a:fontRef idx="minor">
-            <a:schemeClr val="lt1"/>
-          </a:fontRef>
-        </p:style>
-        <p:txBody>
-          <a:bodyPr rtlCol="0" anchor="ctr"/>
-          <a:lstStyle/>
-          <a:p>
-            <a:pPr algn="ctr"/>
-            <a:endParaRPr lang="ko-KR" altLang="en-US"/>
-          </a:p>
-        </p:txBody>
-      </p:sp>
-      <p:sp>
-        <p:nvSpPr>
-          <p:cNvPr id="45" name="사각형: 둥근 모서리 44">
-            <a:extLst>
-              <a:ext uri="{FF2B5EF4-FFF2-40B4-BE49-F238E27FC236}">
-                <a16:creationId xmlns:a16="http://schemas.microsoft.com/office/drawing/2014/main" id="{D1C99C70-2C60-484C-89CD-FC823E3E9CFE}"/>
-              </a:ext>
-            </a:extLst>
-          </p:cNvPr>
-          <p:cNvSpPr/>
-          <p:nvPr/>
-        </p:nvSpPr>
-        <p:spPr>
-          <a:xfrm>
-            <a:off x="3527540" y="1217806"/>
-            <a:ext cx="2985462" cy="2881439"/>
-          </a:xfrm>
-          <a:prstGeom prst="roundRect">
-            <a:avLst>
-              <a:gd name="adj" fmla="val 5661"/>
-            </a:avLst>
-          </a:prstGeom>
-          <a:solidFill>
-            <a:schemeClr val="bg1"/>
-          </a:solidFill>
-          <a:ln>
-            <a:noFill/>
-          </a:ln>
-          <a:effectLst>
-            <a:outerShdw blurRad="228600" dist="50800" dir="5400000" rotWithShape="0">
-              <a:srgbClr val="1B2A4A">
-                <a:alpha val="22000"/>
-              </a:srgbClr>
-            </a:outerShdw>
-          </a:effectLst>
-        </p:spPr>
-        <p:style>
-          <a:lnRef idx="2">
-            <a:schemeClr val="accent1">
-              <a:shade val="50000"/>
-            </a:schemeClr>
-          </a:lnRef>
-          <a:fillRef idx="1">
-            <a:schemeClr val="accent1"/>
-          </a:fillRef>
-          <a:effectRef idx="0">
-            <a:schemeClr val="accent1"/>
-          </a:effectRef>
-          <a:fontRef idx="minor">
-            <a:schemeClr val="lt1"/>
-          </a:fontRef>
-        </p:style>
-        <p:txBody>
-          <a:bodyPr rtlCol="0" anchor="ctr"/>
-          <a:lstStyle/>
-          <a:p>
-            <a:pPr algn="ctr"/>
-            <a:endParaRPr lang="ko-KR" altLang="en-US"/>
-          </a:p>
-        </p:txBody>
-      </p:sp>
-      <p:sp>
-        <p:nvSpPr>
-          <p:cNvPr id="46" name="사각형: 둥근 모서리 45">
-            <a:extLst>
-              <a:ext uri="{FF2B5EF4-FFF2-40B4-BE49-F238E27FC236}">
-                <a16:creationId xmlns:a16="http://schemas.microsoft.com/office/drawing/2014/main" id="{12465051-9ABA-4C7D-A1B9-A3D705ADEC72}"/>
-              </a:ext>
-            </a:extLst>
-          </p:cNvPr>
-          <p:cNvSpPr/>
-          <p:nvPr/>
-        </p:nvSpPr>
-        <p:spPr>
-          <a:xfrm>
-            <a:off x="6713611" y="1217806"/>
-            <a:ext cx="2985462" cy="2881439"/>
-          </a:xfrm>
-          <a:prstGeom prst="roundRect">
-            <a:avLst>
-              <a:gd name="adj" fmla="val 5661"/>
-            </a:avLst>
-          </a:prstGeom>
-          <a:solidFill>
-            <a:schemeClr val="bg1"/>
-          </a:solidFill>
-          <a:ln>
-            <a:noFill/>
-          </a:ln>
-          <a:effectLst>
-            <a:outerShdw blurRad="228600" dist="50800" dir="5400000" rotWithShape="0">
-              <a:srgbClr val="1B2A4A">
-                <a:alpha val="22000"/>
-              </a:srgbClr>
-            </a:outerShdw>
-          </a:effectLst>
-        </p:spPr>
-        <p:style>
-          <a:lnRef idx="2">
-            <a:schemeClr val="accent1">
-              <a:shade val="50000"/>
-            </a:schemeClr>
-          </a:lnRef>
-          <a:fillRef idx="1">
-            <a:schemeClr val="accent1"/>
-          </a:fillRef>
-          <a:effectRef idx="0">
-            <a:schemeClr val="accent1"/>
-          </a:effectRef>
-          <a:fontRef idx="minor">
-            <a:schemeClr val="lt1"/>
-          </a:fontRef>
-        </p:style>
-        <p:txBody>
-          <a:bodyPr rtlCol="0" anchor="ctr"/>
-          <a:lstStyle/>
-          <a:p>
-            <a:pPr algn="ctr"/>
-            <a:endParaRPr lang="ko-KR" altLang="en-US"/>
-          </a:p>
-        </p:txBody>
-      </p:sp>
-      <p:sp>
-        <p:nvSpPr>
-          <p:cNvPr id="12" name="TextBox 11">
-            <a:extLst>
-              <a:ext uri="{FF2B5EF4-FFF2-40B4-BE49-F238E27FC236}">
-                <a16:creationId xmlns:a16="http://schemas.microsoft.com/office/drawing/2014/main" id="{1FA75749-6157-40BB-A74E-394D6C347B77}"/>
-              </a:ext>
-            </a:extLst>
-          </p:cNvPr>
-          <p:cNvSpPr txBox="1"/>
-          <p:nvPr/>
-        </p:nvSpPr>
-        <p:spPr>
-          <a:xfrm>
-            <a:off x="562773" y="1335924"/>
-            <a:ext cx="2520908" cy="323165"/>
-          </a:xfrm>
-          <a:prstGeom prst="rect">
-            <a:avLst/>
-          </a:prstGeom>
-          <a:noFill/>
-        </p:spPr>
-        <p:txBody>
-          <a:bodyPr wrap="square" rtlCol="0">
-            <a:spAutoFit/>
-          </a:bodyPr>
-          <a:lstStyle/>
-          <a:p>
-            <a:pPr algn="ctr"/>
-            <a:r>
-              <a:rPr lang="ko-KR" altLang="en-US" sz="1500" b="1"/>
-              <a:t>회사 업무</a:t>
-            </a:r>
-          </a:p>
-        </p:txBody>
-      </p:sp>
-      <p:cxnSp>
-        <p:nvCxnSpPr>
-          <p:cNvPr id="14" name="직선 연결선 13">
-            <a:extLst>
-              <a:ext uri="{FF2B5EF4-FFF2-40B4-BE49-F238E27FC236}">
-                <a16:creationId xmlns:a16="http://schemas.microsoft.com/office/drawing/2014/main" id="{3336D8E1-00F3-4635-8A14-6290ADD2EACF}"/>
-              </a:ext>
-            </a:extLst>
-          </p:cNvPr>
-          <p:cNvCxnSpPr>
-            <a:cxnSpLocks/>
-          </p:cNvCxnSpPr>
-          <p:nvPr/>
-        </p:nvCxnSpPr>
-        <p:spPr>
-          <a:xfrm>
-            <a:off x="470559" y="1739203"/>
-            <a:ext cx="2705337" cy="0"/>
-          </a:xfrm>
-          <a:prstGeom prst="line">
-            <a:avLst/>
-          </a:prstGeom>
-        </p:spPr>
-        <p:style>
-          <a:lnRef idx="1">
-            <a:schemeClr val="accent1"/>
-          </a:lnRef>
-          <a:fillRef idx="0">
-            <a:schemeClr val="accent1"/>
-          </a:fillRef>
-          <a:effectRef idx="0">
-            <a:schemeClr val="accent1"/>
-          </a:effectRef>
-          <a:fontRef idx="minor">
-            <a:schemeClr val="tx1"/>
-          </a:fontRef>
-        </p:style>
-      </p:cxnSp>
-      <p:sp>
-        <p:nvSpPr>
-          <p:cNvPr id="50" name="TextBox 49">
-            <a:extLst>
-              <a:ext uri="{FF2B5EF4-FFF2-40B4-BE49-F238E27FC236}">
-                <a16:creationId xmlns:a16="http://schemas.microsoft.com/office/drawing/2014/main" id="{6EBBEF99-4056-4026-9C0A-5F83DA10A174}"/>
-              </a:ext>
-            </a:extLst>
-          </p:cNvPr>
-          <p:cNvSpPr txBox="1"/>
-          <p:nvPr/>
-        </p:nvSpPr>
-        <p:spPr>
-          <a:xfrm>
-            <a:off x="3779919" y="1335924"/>
-            <a:ext cx="2520908" cy="323165"/>
-          </a:xfrm>
-          <a:prstGeom prst="rect">
-            <a:avLst/>
-          </a:prstGeom>
-          <a:noFill/>
-        </p:spPr>
-        <p:txBody>
-          <a:bodyPr wrap="square" rtlCol="0">
-            <a:spAutoFit/>
-          </a:bodyPr>
-          <a:lstStyle/>
-          <a:p>
-            <a:pPr algn="ctr"/>
-            <a:r>
-              <a:rPr lang="ko-KR" altLang="en-US" sz="1500" b="1"/>
-              <a:t>문제점</a:t>
-            </a:r>
-          </a:p>
-        </p:txBody>
-      </p:sp>
-      <p:cxnSp>
-        <p:nvCxnSpPr>
-          <p:cNvPr id="52" name="직선 연결선 51">
-            <a:extLst>
-              <a:ext uri="{FF2B5EF4-FFF2-40B4-BE49-F238E27FC236}">
-                <a16:creationId xmlns:a16="http://schemas.microsoft.com/office/drawing/2014/main" id="{6F79F0D2-2158-4094-8A1A-0BCE7B519E87}"/>
-              </a:ext>
-            </a:extLst>
-          </p:cNvPr>
-          <p:cNvCxnSpPr>
-            <a:cxnSpLocks/>
-          </p:cNvCxnSpPr>
-          <p:nvPr/>
-        </p:nvCxnSpPr>
-        <p:spPr>
-          <a:xfrm>
-            <a:off x="3687705" y="1739203"/>
-            <a:ext cx="2705337" cy="0"/>
-          </a:xfrm>
-          <a:prstGeom prst="line">
-            <a:avLst/>
-          </a:prstGeom>
-        </p:spPr>
-        <p:style>
-          <a:lnRef idx="1">
-            <a:schemeClr val="accent1"/>
-          </a:lnRef>
-          <a:fillRef idx="0">
-            <a:schemeClr val="accent1"/>
-          </a:fillRef>
-          <a:effectRef idx="0">
-            <a:schemeClr val="accent1"/>
-          </a:effectRef>
-          <a:fontRef idx="minor">
-            <a:schemeClr val="tx1"/>
-          </a:fontRef>
-        </p:style>
-      </p:cxnSp>
-      <p:sp>
-        <p:nvSpPr>
-          <p:cNvPr id="57" name="TextBox 56">
-            <a:extLst>
-              <a:ext uri="{FF2B5EF4-FFF2-40B4-BE49-F238E27FC236}">
-                <a16:creationId xmlns:a16="http://schemas.microsoft.com/office/drawing/2014/main" id="{C584307B-0BB5-4521-B4EE-F153D3B5F5AE}"/>
-              </a:ext>
-            </a:extLst>
-          </p:cNvPr>
-          <p:cNvSpPr txBox="1"/>
-          <p:nvPr/>
-        </p:nvSpPr>
-        <p:spPr>
-          <a:xfrm>
-            <a:off x="6945888" y="1335924"/>
-            <a:ext cx="2520908" cy="323165"/>
-          </a:xfrm>
-          <a:prstGeom prst="rect">
-            <a:avLst/>
-          </a:prstGeom>
-          <a:noFill/>
-        </p:spPr>
-        <p:txBody>
-          <a:bodyPr wrap="square" rtlCol="0">
-            <a:spAutoFit/>
-          </a:bodyPr>
-          <a:lstStyle/>
-          <a:p>
-            <a:pPr algn="ctr"/>
-            <a:r>
-              <a:rPr lang="ko-KR" altLang="en-US" sz="1500" b="1"/>
-              <a:t>개선 방안</a:t>
-            </a:r>
-          </a:p>
-        </p:txBody>
-      </p:sp>
-      <p:cxnSp>
-        <p:nvCxnSpPr>
-          <p:cNvPr id="60" name="직선 연결선 59">
-            <a:extLst>
-              <a:ext uri="{FF2B5EF4-FFF2-40B4-BE49-F238E27FC236}">
-                <a16:creationId xmlns:a16="http://schemas.microsoft.com/office/drawing/2014/main" id="{D9796B37-8472-4D2F-A913-646D47B51A80}"/>
-              </a:ext>
-            </a:extLst>
-          </p:cNvPr>
-          <p:cNvCxnSpPr>
-            <a:cxnSpLocks/>
-          </p:cNvCxnSpPr>
-          <p:nvPr/>
-        </p:nvCxnSpPr>
-        <p:spPr>
-          <a:xfrm>
-            <a:off x="6853674" y="1739203"/>
-            <a:ext cx="2705337" cy="0"/>
-          </a:xfrm>
-          <a:prstGeom prst="line">
-            <a:avLst/>
-          </a:prstGeom>
-        </p:spPr>
-        <p:style>
-          <a:lnRef idx="1">
-            <a:schemeClr val="accent1"/>
-          </a:lnRef>
-          <a:fillRef idx="0">
-            <a:schemeClr val="accent1"/>
-          </a:fillRef>
-          <a:effectRef idx="0">
-            <a:schemeClr val="accent1"/>
-          </a:effectRef>
-          <a:fontRef idx="minor">
-            <a:schemeClr val="tx1"/>
-          </a:fontRef>
-        </p:style>
-      </p:cxnSp>
-      <p:sp>
-        <p:nvSpPr>
-          <p:cNvPr id="39" name="TextBox 38">
-            <a:extLst>
-              <a:ext uri="{FF2B5EF4-FFF2-40B4-BE49-F238E27FC236}">
-                <a16:creationId xmlns:a16="http://schemas.microsoft.com/office/drawing/2014/main" id="{DFE79726-461E-4F9B-A835-7A3125F4632A}"/>
-              </a:ext>
-            </a:extLst>
-          </p:cNvPr>
-          <p:cNvSpPr txBox="1"/>
-          <p:nvPr/>
-        </p:nvSpPr>
-        <p:spPr>
-          <a:xfrm>
-            <a:off x="349148" y="2995774"/>
-            <a:ext cx="2985461" cy="948978"/>
-          </a:xfrm>
-          <a:prstGeom prst="rect">
-            <a:avLst/>
-          </a:prstGeom>
-          <a:noFill/>
-        </p:spPr>
-        <p:txBody>
-          <a:bodyPr wrap="square" rtlCol="0">
-            <a:spAutoFit/>
-          </a:bodyPr>
-          <a:lstStyle/>
-          <a:p>
-            <a:pPr marL="90488" indent="-90488">
-              <a:spcBef>
-                <a:spcPts val="500"/>
-              </a:spcBef>
-              <a:spcAft>
-                <a:spcPts val="500"/>
-              </a:spcAft>
-              <a:buClr>
-                <a:schemeClr val="accent1">
-                  <a:lumMod val="60000"/>
-                  <a:lumOff val="40000"/>
-                </a:schemeClr>
-              </a:buClr>
-              <a:buFont typeface="Wingdings" panose="05000000000000000000" pitchFamily="2" charset="2"/>
-              <a:buChar char="§"/>
-            </a:pPr>
-            <a:r>
-              <a:rPr lang="ko-KR" altLang="en-US" sz="1300"/>
-              <a:t> 정해진 프로세스와 절차에 따라 처리</a:t>
-            </a:r>
-            <a:endParaRPr lang="en-US" altLang="ko-KR" sz="1300"/>
-          </a:p>
-          <a:p>
-            <a:pPr marL="90488" indent="-90488">
-              <a:spcBef>
-                <a:spcPts val="500"/>
-              </a:spcBef>
-              <a:spcAft>
-                <a:spcPts val="500"/>
-              </a:spcAft>
-              <a:buClr>
-                <a:schemeClr val="accent1">
-                  <a:lumMod val="60000"/>
-                  <a:lumOff val="40000"/>
-                </a:schemeClr>
-              </a:buClr>
-              <a:buFont typeface="Wingdings" panose="05000000000000000000" pitchFamily="2" charset="2"/>
-              <a:buChar char="§"/>
-            </a:pPr>
-            <a:r>
-              <a:rPr lang="en-US" altLang="ko-KR" sz="1300"/>
-              <a:t> </a:t>
-            </a:r>
-            <a:r>
-              <a:rPr lang="ko-KR" altLang="en-US" sz="1300"/>
-              <a:t>담당자가 바뀌어도 필수 절차 준수</a:t>
-            </a:r>
-            <a:endParaRPr lang="en-US" altLang="ko-KR" sz="1300"/>
-          </a:p>
-          <a:p>
-            <a:pPr marL="90488" indent="-90488">
-              <a:spcBef>
-                <a:spcPts val="500"/>
-              </a:spcBef>
-              <a:spcAft>
-                <a:spcPts val="500"/>
-              </a:spcAft>
-              <a:buClr>
-                <a:schemeClr val="accent1">
-                  <a:lumMod val="60000"/>
-                  <a:lumOff val="40000"/>
-                </a:schemeClr>
-              </a:buClr>
-              <a:buFont typeface="Wingdings" panose="05000000000000000000" pitchFamily="2" charset="2"/>
-              <a:buChar char="§"/>
-            </a:pPr>
-            <a:r>
-              <a:rPr lang="ko-KR" altLang="en-US" sz="1300"/>
-              <a:t> 일관된 결과물 확보 필요</a:t>
-            </a:r>
-          </a:p>
-        </p:txBody>
-      </p:sp>
-      <p:pic>
-        <p:nvPicPr>
-          <p:cNvPr id="13" name="그래픽 12" descr="체크리스트 단색으로 채워진">
-            <a:extLst>
-              <a:ext uri="{FF2B5EF4-FFF2-40B4-BE49-F238E27FC236}">
-                <a16:creationId xmlns:a16="http://schemas.microsoft.com/office/drawing/2014/main" id="{0135F75B-0F42-4B60-AC08-FD2CF59A281B}"/>
-              </a:ext>
-            </a:extLst>
-          </p:cNvPr>
-          <p:cNvPicPr>
-            <a:picLocks noChangeAspect="1"/>
-          </p:cNvPicPr>
-          <p:nvPr/>
-        </p:nvPicPr>
-        <p:blipFill>
-          <a:blip r:embed="rId12">
-            <a:extLst>
-              <a:ext uri="{28A0092B-C50C-407E-A947-70E740481C1C}">
-                <a14:useLocalDpi xmlns:a14="http://schemas.microsoft.com/office/drawing/2010/main" val="0"/>
-              </a:ext>
-            </a:extLst>
-          </a:blip>
-          <a:stretch>
-            <a:fillRect/>
-          </a:stretch>
-        </p:blipFill>
-        <p:spPr>
-          <a:xfrm>
-            <a:off x="1475519" y="1959127"/>
-            <a:ext cx="755703" cy="755703"/>
-          </a:xfrm>
-          <a:prstGeom prst="rect">
-            <a:avLst/>
-          </a:prstGeom>
-        </p:spPr>
-      </p:pic>
-      <p:sp>
-        <p:nvSpPr>
-          <p:cNvPr id="43" name="TextBox 42">
-            <a:extLst>
-              <a:ext uri="{FF2B5EF4-FFF2-40B4-BE49-F238E27FC236}">
-                <a16:creationId xmlns:a16="http://schemas.microsoft.com/office/drawing/2014/main" id="{80CE7C00-4BD4-4C02-BA3C-66110498AE87}"/>
-              </a:ext>
-            </a:extLst>
-          </p:cNvPr>
-          <p:cNvSpPr txBox="1"/>
-          <p:nvPr/>
-        </p:nvSpPr>
-        <p:spPr>
-          <a:xfrm>
-            <a:off x="3527541" y="2995774"/>
-            <a:ext cx="3114419" cy="948978"/>
-          </a:xfrm>
-          <a:prstGeom prst="rect">
-            <a:avLst/>
-          </a:prstGeom>
-          <a:noFill/>
-        </p:spPr>
-        <p:txBody>
-          <a:bodyPr wrap="square" rtlCol="0">
-            <a:spAutoFit/>
-          </a:bodyPr>
-          <a:lstStyle/>
-          <a:p>
-            <a:pPr marL="90488" indent="-90488">
-              <a:spcBef>
-                <a:spcPts val="500"/>
-              </a:spcBef>
-              <a:spcAft>
-                <a:spcPts val="500"/>
-              </a:spcAft>
-              <a:buClr>
-                <a:schemeClr val="accent1">
-                  <a:lumMod val="60000"/>
-                  <a:lumOff val="40000"/>
-                </a:schemeClr>
-              </a:buClr>
-              <a:buFont typeface="Wingdings" panose="05000000000000000000" pitchFamily="2" charset="2"/>
-              <a:buChar char="§"/>
-            </a:pPr>
-            <a:r>
-              <a:rPr lang="ko-KR" altLang="en-US" sz="1300"/>
-              <a:t> </a:t>
-            </a:r>
-            <a:r>
-              <a:rPr lang="ko-KR" altLang="en-US" sz="1300" spc="-40"/>
-              <a:t>필요한 절차와 지침을 찾는데 시간 소요</a:t>
-            </a:r>
-            <a:endParaRPr lang="en-US" altLang="ko-KR" sz="1300" spc="-40"/>
-          </a:p>
-          <a:p>
-            <a:pPr marL="90488" indent="-90488">
-              <a:spcBef>
-                <a:spcPts val="500"/>
-              </a:spcBef>
-              <a:spcAft>
-                <a:spcPts val="500"/>
-              </a:spcAft>
-              <a:buClr>
-                <a:schemeClr val="accent1">
-                  <a:lumMod val="60000"/>
-                  <a:lumOff val="40000"/>
-                </a:schemeClr>
-              </a:buClr>
-              <a:buFont typeface="Wingdings" panose="05000000000000000000" pitchFamily="2" charset="2"/>
-              <a:buChar char="§"/>
-            </a:pPr>
-            <a:r>
-              <a:rPr lang="en-US" altLang="ko-KR" sz="1300" spc="-40"/>
-              <a:t> </a:t>
-            </a:r>
-            <a:r>
-              <a:rPr lang="ko-KR" altLang="en-US" sz="1300"/>
-              <a:t>담당자마다 처리 방식이 다름</a:t>
-            </a:r>
-            <a:endParaRPr lang="en-US" altLang="ko-KR" sz="1300"/>
-          </a:p>
-          <a:p>
-            <a:pPr marL="90488" indent="-90488">
-              <a:spcBef>
-                <a:spcPts val="500"/>
-              </a:spcBef>
-              <a:spcAft>
-                <a:spcPts val="500"/>
-              </a:spcAft>
-              <a:buClr>
-                <a:schemeClr val="accent1">
-                  <a:lumMod val="60000"/>
-                  <a:lumOff val="40000"/>
-                </a:schemeClr>
-              </a:buClr>
-              <a:buFont typeface="Wingdings" panose="05000000000000000000" pitchFamily="2" charset="2"/>
-              <a:buChar char="§"/>
-            </a:pPr>
-            <a:r>
-              <a:rPr lang="ko-KR" altLang="en-US" sz="1300"/>
-              <a:t> 업무 누락과 편차 발생</a:t>
-            </a:r>
-          </a:p>
-        </p:txBody>
-      </p:sp>
-      <p:pic>
-        <p:nvPicPr>
-          <p:cNvPr id="16" name="그래픽 15" descr="물음표 단색으로 채워진">
-            <a:extLst>
-              <a:ext uri="{FF2B5EF4-FFF2-40B4-BE49-F238E27FC236}">
-                <a16:creationId xmlns:a16="http://schemas.microsoft.com/office/drawing/2014/main" id="{37F2DC6D-0D3D-47E1-B656-D277CD737936}"/>
-              </a:ext>
-            </a:extLst>
-          </p:cNvPr>
-          <p:cNvPicPr>
-            <a:picLocks noChangeAspect="1"/>
-          </p:cNvPicPr>
-          <p:nvPr/>
-        </p:nvPicPr>
-        <p:blipFill>
-          <a:blip r:embed="rId13">
-            <a:extLst>
-              <a:ext uri="{28A0092B-C50C-407E-A947-70E740481C1C}">
-                <a14:useLocalDpi xmlns:a14="http://schemas.microsoft.com/office/drawing/2010/main" val="0"/>
-              </a:ext>
-            </a:extLst>
-          </a:blip>
-          <a:stretch>
-            <a:fillRect/>
-          </a:stretch>
-        </p:blipFill>
-        <p:spPr>
-          <a:xfrm>
-            <a:off x="4597946" y="1959127"/>
-            <a:ext cx="755703" cy="755703"/>
-          </a:xfrm>
-          <a:prstGeom prst="rect">
-            <a:avLst/>
-          </a:prstGeom>
-        </p:spPr>
-      </p:pic>
-      <p:sp>
-        <p:nvSpPr>
-          <p:cNvPr id="51" name="TextBox 50">
-            <a:extLst>
-              <a:ext uri="{FF2B5EF4-FFF2-40B4-BE49-F238E27FC236}">
-                <a16:creationId xmlns:a16="http://schemas.microsoft.com/office/drawing/2014/main" id="{BFA5A8A9-28C1-465A-8FA8-791A2996B35D}"/>
-              </a:ext>
-            </a:extLst>
-          </p:cNvPr>
-          <p:cNvSpPr txBox="1"/>
-          <p:nvPr/>
-        </p:nvSpPr>
-        <p:spPr>
-          <a:xfrm>
-            <a:off x="6713612" y="2995774"/>
-            <a:ext cx="2985461" cy="820738"/>
-          </a:xfrm>
-          <a:prstGeom prst="rect">
-            <a:avLst/>
-          </a:prstGeom>
-          <a:noFill/>
-        </p:spPr>
-        <p:txBody>
-          <a:bodyPr wrap="square" rtlCol="0">
-            <a:spAutoFit/>
-          </a:bodyPr>
-          <a:lstStyle/>
-          <a:p>
-            <a:pPr marL="90488" indent="-90488">
-              <a:spcBef>
-                <a:spcPts val="500"/>
-              </a:spcBef>
-              <a:buClr>
-                <a:schemeClr val="accent1">
-                  <a:lumMod val="60000"/>
-                  <a:lumOff val="40000"/>
-                </a:schemeClr>
-              </a:buClr>
-              <a:buFont typeface="Wingdings" panose="05000000000000000000" pitchFamily="2" charset="2"/>
-              <a:buChar char="§"/>
-            </a:pPr>
-            <a:r>
-              <a:rPr lang="ko-KR" altLang="en-US" sz="1300"/>
-              <a:t> </a:t>
-            </a:r>
-            <a:r>
-              <a:rPr lang="ko-KR" altLang="en-US" sz="1300" spc="-40">
-                <a:solidFill>
-                  <a:prstClr val="black"/>
-                </a:solidFill>
-                <a:latin typeface="맑은 고딕"/>
-                <a:ea typeface="맑은 고딕" panose="020B0503020000020004" pitchFamily="50" charset="-127"/>
-                <a:sym typeface="Wingdings" pitchFamily="2" charset="2"/>
-              </a:rPr>
-              <a:t>수행하려는 업무를 </a:t>
-            </a:r>
-            <a:r>
-              <a:rPr lang="ko-KR" altLang="en-US" sz="1300"/>
-              <a:t>입력하면 </a:t>
-            </a:r>
-            <a:endParaRPr lang="en-US" altLang="ko-KR" sz="1300"/>
-          </a:p>
-          <a:p>
-            <a:pPr>
-              <a:spcBef>
-                <a:spcPts val="500"/>
-              </a:spcBef>
-              <a:buClr>
-                <a:schemeClr val="accent1">
-                  <a:lumMod val="60000"/>
-                  <a:lumOff val="40000"/>
-                </a:schemeClr>
-              </a:buClr>
-            </a:pPr>
-            <a:r>
-              <a:rPr lang="en-US" altLang="ko-KR" sz="1300"/>
-              <a:t>   </a:t>
-            </a:r>
-            <a:r>
-              <a:rPr lang="ko-KR" altLang="en-US" sz="1300" b="1"/>
-              <a:t>처리 절차와 지침을 쉽게 안내하는</a:t>
-            </a:r>
-            <a:endParaRPr lang="en-US" altLang="ko-KR" sz="1300" b="1"/>
-          </a:p>
-          <a:p>
-            <a:pPr>
-              <a:spcBef>
-                <a:spcPts val="500"/>
-              </a:spcBef>
-              <a:buClr>
-                <a:schemeClr val="accent1">
-                  <a:lumMod val="60000"/>
-                  <a:lumOff val="40000"/>
-                </a:schemeClr>
-              </a:buClr>
-            </a:pPr>
-            <a:r>
-              <a:rPr lang="en-US" altLang="ko-KR" sz="1300" b="1"/>
-              <a:t>  </a:t>
-            </a:r>
-            <a:r>
-              <a:rPr lang="ko-KR" altLang="en-US" sz="1300" b="1"/>
-              <a:t> </a:t>
-            </a:r>
-            <a:r>
-              <a:rPr lang="en-US" altLang="ko-KR" sz="1300" b="1"/>
-              <a:t>『</a:t>
-            </a:r>
-            <a:r>
-              <a:rPr lang="ko-KR" altLang="en-US" sz="1300" b="1"/>
-              <a:t>업무 지침 네비게이터</a:t>
-            </a:r>
-            <a:r>
-              <a:rPr lang="en-US" altLang="ko-KR" sz="1300" b="1"/>
-              <a:t>』 </a:t>
-            </a:r>
-            <a:r>
-              <a:rPr lang="ko-KR" altLang="en-US" sz="1300" b="1"/>
-              <a:t>구축</a:t>
-            </a:r>
-            <a:endParaRPr lang="ko-KR" altLang="en-US" sz="1300"/>
-          </a:p>
-        </p:txBody>
-      </p:sp>
-      <p:pic>
-        <p:nvPicPr>
-          <p:cNvPr id="34" name="그림 33">
-            <a:extLst>
-              <a:ext uri="{FF2B5EF4-FFF2-40B4-BE49-F238E27FC236}">
-                <a16:creationId xmlns:a16="http://schemas.microsoft.com/office/drawing/2014/main" id="{9D207778-395A-407B-BF36-D2E69C775692}"/>
-              </a:ext>
-            </a:extLst>
-          </p:cNvPr>
-          <p:cNvPicPr>
-            <a:picLocks noChangeAspect="1"/>
-          </p:cNvPicPr>
-          <p:nvPr/>
-        </p:nvPicPr>
-        <p:blipFill>
-          <a:blip r:embed="rId14">
-            <a:extLst>
-              <a:ext uri="{28A0092B-C50C-407E-A947-70E740481C1C}">
-                <a14:useLocalDpi xmlns:a14="http://schemas.microsoft.com/office/drawing/2010/main" val="0"/>
-              </a:ext>
-            </a:extLst>
-          </a:blip>
-          <a:stretch>
-            <a:fillRect/>
-          </a:stretch>
-        </p:blipFill>
-        <p:spPr>
-          <a:xfrm>
-            <a:off x="7256630" y="1814756"/>
-            <a:ext cx="1899424" cy="1068994"/>
-          </a:xfrm>
-          <a:prstGeom prst="rect">
-            <a:avLst/>
-          </a:prstGeom>
-        </p:spPr>
-      </p:pic>
-      <p:sp>
-        <p:nvSpPr>
-          <p:cNvPr id="56" name="TextBox 55">
-            <a:extLst>
-              <a:ext uri="{FF2B5EF4-FFF2-40B4-BE49-F238E27FC236}">
-                <a16:creationId xmlns:a16="http://schemas.microsoft.com/office/drawing/2014/main" id="{84379734-9EBD-4B03-9465-8E1A8B1D887B}"/>
-              </a:ext>
-            </a:extLst>
-          </p:cNvPr>
-          <p:cNvSpPr txBox="1"/>
-          <p:nvPr/>
-        </p:nvSpPr>
-        <p:spPr>
-          <a:xfrm>
-            <a:off x="8792918" y="283028"/>
-            <a:ext cx="1091310" cy="307777"/>
-          </a:xfrm>
-          <a:prstGeom prst="rect">
-            <a:avLst/>
-          </a:prstGeom>
-          <a:noFill/>
-        </p:spPr>
-        <p:txBody>
-          <a:bodyPr wrap="square" rtlCol="0">
-            <a:spAutoFit/>
-          </a:bodyPr>
-          <a:lstStyle/>
-          <a:p>
-            <a:pPr algn="r"/>
-            <a:r>
-              <a:rPr lang="en-US" altLang="ko-KR" sz="1400" b="1">
-                <a:solidFill>
-                  <a:schemeClr val="bg1"/>
-                </a:solidFill>
-                <a:latin typeface="+mj-ea"/>
-                <a:ea typeface="+mj-ea"/>
-              </a:rPr>
-              <a:t>(1/6)</a:t>
-            </a:r>
-            <a:endParaRPr lang="ko-KR" altLang="en-US" sz="1400" b="1">
-              <a:solidFill>
-                <a:schemeClr val="bg1"/>
-              </a:solidFill>
-              <a:latin typeface="+mj-ea"/>
-              <a:ea typeface="+mj-ea"/>
-            </a:endParaRPr>
-          </a:p>
-        </p:txBody>
-      </p:sp>
     </p:spTree>
     <p:extLst>
       <p:ext uri="{BB962C8B-B14F-4D97-AF65-F5344CB8AC3E}">
@@ -6508,8 +6507,8 @@
         </p:nvSpPr>
         <p:spPr>
           <a:xfrm>
-            <a:off x="269680" y="6101535"/>
-            <a:ext cx="9420639" cy="505290"/>
+            <a:off x="325500" y="6101535"/>
+            <a:ext cx="9354428" cy="505290"/>
           </a:xfrm>
           <a:prstGeom prst="rect">
             <a:avLst/>
@@ -9935,7 +9934,7 @@
         </p:nvGrpSpPr>
         <p:grpSpPr>
           <a:xfrm>
-            <a:off x="335891" y="6138454"/>
+            <a:off x="325500" y="6138454"/>
             <a:ext cx="511817" cy="431452"/>
             <a:chOff x="-895525" y="3274733"/>
             <a:chExt cx="619300" cy="474597"/>
@@ -10198,7 +10197,7 @@
                 <a:latin typeface="+mn-ea"/>
                 <a:cs typeface="+mn-cs"/>
               </a:rPr>
-              <a:t>. (</a:t>
+              <a:t>. </a:t>
             </a:r>
             <a:r>
               <a:rPr lang="en-US" altLang="ko-KR" sz="2000" b="1" spc="-100">
@@ -10216,7 +10215,7 @@
                 </a:solidFill>
                 <a:latin typeface="+mn-ea"/>
               </a:rPr>
-              <a:t> 시도</a:t>
+              <a:t> 시도를 통한</a:t>
             </a:r>
             <a:r>
               <a:rPr lang="en-US" altLang="ko-KR" sz="2000" b="1" spc="-100">
@@ -10225,7 +10224,7 @@
                 </a:solidFill>
                 <a:latin typeface="+mn-ea"/>
               </a:rPr>
-              <a:t>) </a:t>
+              <a:t> </a:t>
             </a:r>
             <a:r>
               <a:rPr lang="ko-KR" altLang="en-US" sz="2000" b="1" spc="-100">
@@ -13272,7 +13271,7 @@
         </p:nvSpPr>
         <p:spPr>
           <a:xfrm>
-            <a:off x="6621341" y="5016607"/>
+            <a:off x="6621341" y="4975043"/>
             <a:ext cx="2928750" cy="634989"/>
           </a:xfrm>
           <a:prstGeom prst="roundRect">
@@ -13321,7 +13320,7 @@
         </p:nvSpPr>
         <p:spPr>
           <a:xfrm>
-            <a:off x="630194" y="5016607"/>
+            <a:off x="630194" y="4975043"/>
             <a:ext cx="2928750" cy="634989"/>
           </a:xfrm>
           <a:prstGeom prst="roundRect">
@@ -13370,7 +13369,7 @@
         </p:nvSpPr>
         <p:spPr>
           <a:xfrm>
-            <a:off x="3624568" y="5016607"/>
+            <a:off x="3624568" y="4975043"/>
             <a:ext cx="2928750" cy="634989"/>
           </a:xfrm>
           <a:prstGeom prst="roundRect">
@@ -13417,7 +13416,7 @@
         </p:nvSpPr>
         <p:spPr>
           <a:xfrm>
-            <a:off x="6621341" y="5028292"/>
+            <a:off x="6621341" y="4986728"/>
             <a:ext cx="1044224" cy="369332"/>
           </a:xfrm>
           <a:prstGeom prst="rect">
@@ -13457,7 +13456,7 @@
         </p:nvSpPr>
         <p:spPr>
           <a:xfrm>
-            <a:off x="7392159" y="5066764"/>
+            <a:off x="7392159" y="5025200"/>
             <a:ext cx="1670730" cy="292388"/>
           </a:xfrm>
           <a:prstGeom prst="rect">
@@ -13502,7 +13501,7 @@
         </p:nvSpPr>
         <p:spPr>
           <a:xfrm>
-            <a:off x="630194" y="5028292"/>
+            <a:off x="630194" y="4986728"/>
             <a:ext cx="759638" cy="369332"/>
           </a:xfrm>
           <a:prstGeom prst="rect">
@@ -13539,7 +13538,7 @@
         </p:nvSpPr>
         <p:spPr>
           <a:xfrm>
-            <a:off x="1447713" y="5066764"/>
+            <a:off x="1447713" y="5025200"/>
             <a:ext cx="2176854" cy="292388"/>
           </a:xfrm>
           <a:prstGeom prst="rect">
@@ -13582,7 +13581,7 @@
         </p:nvSpPr>
         <p:spPr>
           <a:xfrm>
-            <a:off x="3624568" y="5028292"/>
+            <a:off x="3624568" y="4986728"/>
             <a:ext cx="728638" cy="369332"/>
           </a:xfrm>
           <a:prstGeom prst="rect">
@@ -13622,7 +13621,7 @@
         </p:nvSpPr>
         <p:spPr>
           <a:xfrm>
-            <a:off x="4395269" y="5066764"/>
+            <a:off x="4395269" y="5025200"/>
             <a:ext cx="2200109" cy="292388"/>
           </a:xfrm>
           <a:prstGeom prst="rect">
@@ -13667,7 +13666,7 @@
         </p:nvSpPr>
         <p:spPr>
           <a:xfrm>
-            <a:off x="4395269" y="5383311"/>
+            <a:off x="4395269" y="5341747"/>
             <a:ext cx="2200109" cy="276999"/>
           </a:xfrm>
           <a:prstGeom prst="rect">
@@ -13771,7 +13770,7 @@
         </p:nvSpPr>
         <p:spPr>
           <a:xfrm>
-            <a:off x="1489277" y="5383311"/>
+            <a:off x="1489277" y="5341747"/>
             <a:ext cx="2139762" cy="276999"/>
           </a:xfrm>
           <a:prstGeom prst="rect">
@@ -13877,7 +13876,7 @@
         </p:nvSpPr>
         <p:spPr>
           <a:xfrm>
-            <a:off x="7392159" y="5383311"/>
+            <a:off x="7392159" y="5341747"/>
             <a:ext cx="2252206" cy="276999"/>
           </a:xfrm>
           <a:prstGeom prst="rect">
@@ -15336,7 +15335,7 @@
         </p:nvSpPr>
         <p:spPr>
           <a:xfrm>
-            <a:off x="400396" y="5791856"/>
+            <a:off x="400396" y="5733441"/>
             <a:ext cx="707535" cy="276999"/>
           </a:xfrm>
           <a:prstGeom prst="roundRect">
@@ -15395,7 +15394,7 @@
         </p:nvSpPr>
         <p:spPr>
           <a:xfrm>
-            <a:off x="400396" y="4673646"/>
+            <a:off x="400396" y="4632082"/>
             <a:ext cx="707535" cy="276999"/>
           </a:xfrm>
           <a:prstGeom prst="roundRect">
@@ -15454,7 +15453,7 @@
         </p:nvCxnSpPr>
         <p:spPr>
           <a:xfrm>
-            <a:off x="500611" y="4980166"/>
+            <a:off x="500611" y="4938602"/>
             <a:ext cx="0" cy="747657"/>
           </a:xfrm>
           <a:prstGeom prst="straightConnector1">
@@ -15493,8 +15492,8 @@
         </p:nvSpPr>
         <p:spPr>
           <a:xfrm>
-            <a:off x="1193871" y="5768544"/>
-            <a:ext cx="5329732" cy="307777"/>
+            <a:off x="1193870" y="5717419"/>
+            <a:ext cx="7875945" cy="309043"/>
           </a:xfrm>
           <a:prstGeom prst="rect">
             <a:avLst/>
@@ -15549,7 +15548,49 @@
               </a:rPr>
               <a:t> GPT-5.6 Luna) </a:t>
             </a:r>
-            <a:endParaRPr lang="ko-KR" altLang="en-US" sz="1400">
+            <a:r>
+              <a:rPr lang="ko-KR" altLang="en-US" sz="1400" b="1" i="0">
+                <a:solidFill>
+                  <a:srgbClr val="0000FF"/>
+                </a:solidFill>
+                <a:effectLst/>
+                <a:latin typeface="+mn-ea"/>
+              </a:rPr>
+              <a:t>→ </a:t>
+            </a:r>
+            <a:r>
+              <a:rPr lang="en-US" altLang="ko-KR" sz="1400" b="1" i="0">
+                <a:solidFill>
+                  <a:srgbClr val="0000FF"/>
+                </a:solidFill>
+                <a:effectLst/>
+                <a:latin typeface="+mn-ea"/>
+              </a:rPr>
+              <a:t>GPT-5.6 Luna </a:t>
+            </a:r>
+            <a:r>
+              <a:rPr lang="ko-KR" altLang="en-US" sz="1400" b="1">
+                <a:solidFill>
+                  <a:srgbClr val="0000FF"/>
+                </a:solidFill>
+                <a:latin typeface="+mn-ea"/>
+              </a:rPr>
+              <a:t>최종 채택</a:t>
+            </a:r>
+            <a:r>
+              <a:rPr lang="en-US" altLang="ko-KR" sz="1400" b="1" i="0">
+                <a:solidFill>
+                  <a:srgbClr val="0000FF"/>
+                </a:solidFill>
+                <a:effectLst/>
+                <a:latin typeface="+mn-ea"/>
+              </a:rPr>
+              <a:t> </a:t>
+            </a:r>
+            <a:endParaRPr lang="ko-KR" altLang="en-US" sz="1400" b="1">
+              <a:solidFill>
+                <a:srgbClr val="0000FF"/>
+              </a:solidFill>
               <a:latin typeface="+mn-ea"/>
             </a:endParaRPr>
           </a:p>
@@ -15571,7 +15612,7 @@
         </p:nvSpPr>
         <p:spPr>
           <a:xfrm>
-            <a:off x="6621341" y="6124968"/>
+            <a:off x="6621341" y="6083404"/>
             <a:ext cx="2928750" cy="634989"/>
           </a:xfrm>
           <a:prstGeom prst="roundRect">
@@ -15620,7 +15661,7 @@
         </p:nvSpPr>
         <p:spPr>
           <a:xfrm>
-            <a:off x="630194" y="6124968"/>
+            <a:off x="630194" y="6083404"/>
             <a:ext cx="2928750" cy="634989"/>
           </a:xfrm>
           <a:prstGeom prst="roundRect">
@@ -15671,7 +15712,7 @@
         </p:nvSpPr>
         <p:spPr>
           <a:xfrm>
-            <a:off x="3624568" y="6124968"/>
+            <a:off x="3624568" y="6083404"/>
             <a:ext cx="2928750" cy="634989"/>
           </a:xfrm>
           <a:prstGeom prst="roundRect">
@@ -15720,7 +15761,7 @@
         </p:nvSpPr>
         <p:spPr>
           <a:xfrm>
-            <a:off x="6621341" y="6136653"/>
+            <a:off x="6621341" y="6095089"/>
             <a:ext cx="1044224" cy="369332"/>
           </a:xfrm>
           <a:prstGeom prst="rect">
@@ -15763,7 +15804,7 @@
         </p:nvSpPr>
         <p:spPr>
           <a:xfrm>
-            <a:off x="7399086" y="6175125"/>
+            <a:off x="7399086" y="6133561"/>
             <a:ext cx="1670730" cy="292388"/>
           </a:xfrm>
           <a:prstGeom prst="rect">
@@ -15808,7 +15849,7 @@
         </p:nvSpPr>
         <p:spPr>
           <a:xfrm>
-            <a:off x="630194" y="6136653"/>
+            <a:off x="630194" y="6095089"/>
             <a:ext cx="759638" cy="369332"/>
           </a:xfrm>
           <a:prstGeom prst="rect">
@@ -15845,7 +15886,7 @@
         </p:nvSpPr>
         <p:spPr>
           <a:xfrm>
-            <a:off x="1444249" y="6175125"/>
+            <a:off x="1444249" y="6133561"/>
             <a:ext cx="2176854" cy="292388"/>
           </a:xfrm>
           <a:prstGeom prst="rect">
@@ -15888,7 +15929,7 @@
         </p:nvSpPr>
         <p:spPr>
           <a:xfrm>
-            <a:off x="3624568" y="6136653"/>
+            <a:off x="3624568" y="6095089"/>
             <a:ext cx="728638" cy="369332"/>
           </a:xfrm>
           <a:prstGeom prst="rect">
@@ -15928,7 +15969,7 @@
         </p:nvSpPr>
         <p:spPr>
           <a:xfrm>
-            <a:off x="4402196" y="6175125"/>
+            <a:off x="4402196" y="6133561"/>
             <a:ext cx="2200109" cy="292388"/>
           </a:xfrm>
           <a:prstGeom prst="rect">
@@ -15973,7 +16014,7 @@
         </p:nvSpPr>
         <p:spPr>
           <a:xfrm>
-            <a:off x="4402196" y="6491672"/>
+            <a:off x="4402196" y="6450108"/>
             <a:ext cx="2200109" cy="276999"/>
           </a:xfrm>
           <a:prstGeom prst="rect">
@@ -16077,7 +16118,7 @@
         </p:nvSpPr>
         <p:spPr>
           <a:xfrm>
-            <a:off x="1485813" y="6491672"/>
+            <a:off x="1485813" y="6450108"/>
             <a:ext cx="2139762" cy="276999"/>
           </a:xfrm>
           <a:prstGeom prst="rect">
@@ -16173,7 +16214,7 @@
         </p:nvSpPr>
         <p:spPr>
           <a:xfrm>
-            <a:off x="7399086" y="6491672"/>
+            <a:off x="7399086" y="6450108"/>
             <a:ext cx="2252206" cy="276999"/>
           </a:xfrm>
           <a:prstGeom prst="rect">
@@ -16240,7 +16281,7 @@
         </p:nvSpPr>
         <p:spPr>
           <a:xfrm>
-            <a:off x="1193871" y="4658257"/>
+            <a:off x="1193870" y="4616693"/>
             <a:ext cx="4951268" cy="307777"/>
           </a:xfrm>
           <a:prstGeom prst="rect">
@@ -16272,7 +16313,7 @@
     </p:spTree>
     <p:extLst>
       <p:ext uri="{BB962C8B-B14F-4D97-AF65-F5344CB8AC3E}">
-        <p14:creationId xmlns:p14="http://schemas.microsoft.com/office/powerpoint/2010/main" val="2381020833"/>
+        <p14:creationId xmlns:p14="http://schemas.microsoft.com/office/powerpoint/2010/main" val="3514393205"/>
       </p:ext>
     </p:extLst>
   </p:cSld>
@@ -21033,7 +21074,7 @@
     </p:spTree>
     <p:extLst>
       <p:ext uri="{BB962C8B-B14F-4D97-AF65-F5344CB8AC3E}">
-        <p14:creationId xmlns:p14="http://schemas.microsoft.com/office/powerpoint/2010/main" val="195416393"/>
+        <p14:creationId xmlns:p14="http://schemas.microsoft.com/office/powerpoint/2010/main" val="1126135889"/>
       </p:ext>
     </p:extLst>
   </p:cSld>

--- a/presentation/260916_AI활용_업무지침네비게이터_5차 수정.pptx
+++ b/presentation/260916_AI활용_업무지침네비게이터_5차 수정.pptx
@@ -686,7 +686,7 @@
           <a:p>
             <a:fld id="{6AC0F0B2-DC44-4D7F-B9BC-23EB46679998}" type="datetimeFigureOut">
               <a:rPr lang="ko-KR" altLang="en-US" smtClean="0"/>
-              <a:t>2026-09-12</a:t>
+              <a:t>2026-09-13</a:t>
             </a:fld>
             <a:endParaRPr lang="ko-KR" altLang="en-US"/>
           </a:p>
@@ -856,7 +856,7 @@
           <a:p>
             <a:fld id="{6AC0F0B2-DC44-4D7F-B9BC-23EB46679998}" type="datetimeFigureOut">
               <a:rPr lang="ko-KR" altLang="en-US" smtClean="0"/>
-              <a:t>2026-09-12</a:t>
+              <a:t>2026-09-13</a:t>
             </a:fld>
             <a:endParaRPr lang="ko-KR" altLang="en-US"/>
           </a:p>
@@ -1036,7 +1036,7 @@
           <a:p>
             <a:fld id="{6AC0F0B2-DC44-4D7F-B9BC-23EB46679998}" type="datetimeFigureOut">
               <a:rPr lang="ko-KR" altLang="en-US" smtClean="0"/>
-              <a:t>2026-09-12</a:t>
+              <a:t>2026-09-13</a:t>
             </a:fld>
             <a:endParaRPr lang="ko-KR" altLang="en-US"/>
           </a:p>
@@ -1206,7 +1206,7 @@
           <a:p>
             <a:fld id="{6AC0F0B2-DC44-4D7F-B9BC-23EB46679998}" type="datetimeFigureOut">
               <a:rPr lang="ko-KR" altLang="en-US" smtClean="0"/>
-              <a:t>2026-09-12</a:t>
+              <a:t>2026-09-13</a:t>
             </a:fld>
             <a:endParaRPr lang="ko-KR" altLang="en-US"/>
           </a:p>
@@ -1450,7 +1450,7 @@
           <a:p>
             <a:fld id="{6AC0F0B2-DC44-4D7F-B9BC-23EB46679998}" type="datetimeFigureOut">
               <a:rPr lang="ko-KR" altLang="en-US" smtClean="0"/>
-              <a:t>2026-09-12</a:t>
+              <a:t>2026-09-13</a:t>
             </a:fld>
             <a:endParaRPr lang="ko-KR" altLang="en-US"/>
           </a:p>
@@ -1682,7 +1682,7 @@
           <a:p>
             <a:fld id="{6AC0F0B2-DC44-4D7F-B9BC-23EB46679998}" type="datetimeFigureOut">
               <a:rPr lang="ko-KR" altLang="en-US" smtClean="0"/>
-              <a:t>2026-09-12</a:t>
+              <a:t>2026-09-13</a:t>
             </a:fld>
             <a:endParaRPr lang="ko-KR" altLang="en-US"/>
           </a:p>
@@ -2049,7 +2049,7 @@
           <a:p>
             <a:fld id="{6AC0F0B2-DC44-4D7F-B9BC-23EB46679998}" type="datetimeFigureOut">
               <a:rPr lang="ko-KR" altLang="en-US" smtClean="0"/>
-              <a:t>2026-09-12</a:t>
+              <a:t>2026-09-13</a:t>
             </a:fld>
             <a:endParaRPr lang="ko-KR" altLang="en-US"/>
           </a:p>
@@ -2167,7 +2167,7 @@
           <a:p>
             <a:fld id="{6AC0F0B2-DC44-4D7F-B9BC-23EB46679998}" type="datetimeFigureOut">
               <a:rPr lang="ko-KR" altLang="en-US" smtClean="0"/>
-              <a:t>2026-09-12</a:t>
+              <a:t>2026-09-13</a:t>
             </a:fld>
             <a:endParaRPr lang="ko-KR" altLang="en-US"/>
           </a:p>
@@ -2262,7 +2262,7 @@
           <a:p>
             <a:fld id="{6AC0F0B2-DC44-4D7F-B9BC-23EB46679998}" type="datetimeFigureOut">
               <a:rPr lang="ko-KR" altLang="en-US" smtClean="0"/>
-              <a:t>2026-09-12</a:t>
+              <a:t>2026-09-13</a:t>
             </a:fld>
             <a:endParaRPr lang="ko-KR" altLang="en-US"/>
           </a:p>
@@ -2539,7 +2539,7 @@
           <a:p>
             <a:fld id="{6AC0F0B2-DC44-4D7F-B9BC-23EB46679998}" type="datetimeFigureOut">
               <a:rPr lang="ko-KR" altLang="en-US" smtClean="0"/>
-              <a:t>2026-09-12</a:t>
+              <a:t>2026-09-13</a:t>
             </a:fld>
             <a:endParaRPr lang="ko-KR" altLang="en-US"/>
           </a:p>
@@ -2796,7 +2796,7 @@
           <a:p>
             <a:fld id="{6AC0F0B2-DC44-4D7F-B9BC-23EB46679998}" type="datetimeFigureOut">
               <a:rPr lang="ko-KR" altLang="en-US" smtClean="0"/>
-              <a:t>2026-09-12</a:t>
+              <a:t>2026-09-13</a:t>
             </a:fld>
             <a:endParaRPr lang="ko-KR" altLang="en-US"/>
           </a:p>
@@ -3009,7 +3009,7 @@
           <a:p>
             <a:fld id="{6AC0F0B2-DC44-4D7F-B9BC-23EB46679998}" type="datetimeFigureOut">
               <a:rPr lang="ko-KR" altLang="en-US" smtClean="0"/>
-              <a:t>2026-09-12</a:t>
+              <a:t>2026-09-13</a:t>
             </a:fld>
             <a:endParaRPr lang="ko-KR" altLang="en-US"/>
           </a:p>
@@ -16546,7 +16546,7 @@
         </p:nvSpPr>
         <p:spPr>
           <a:xfrm>
-            <a:off x="4257155" y="1290892"/>
+            <a:off x="4038944" y="1290892"/>
             <a:ext cx="1657198" cy="406475"/>
           </a:xfrm>
           <a:prstGeom prst="roundRect">
@@ -16615,7 +16615,7 @@
         </p:nvSpPr>
         <p:spPr>
           <a:xfrm>
-            <a:off x="4257155" y="2096435"/>
+            <a:off x="4038944" y="2096435"/>
             <a:ext cx="1657198" cy="406475"/>
           </a:xfrm>
           <a:prstGeom prst="roundRect">
@@ -16702,7 +16702,7 @@
         </p:nvSpPr>
         <p:spPr>
           <a:xfrm>
-            <a:off x="4257156" y="2957030"/>
+            <a:off x="4038945" y="2957030"/>
             <a:ext cx="1657197" cy="406475"/>
           </a:xfrm>
           <a:prstGeom prst="roundRect">
@@ -16765,7 +16765,7 @@
         </p:nvSpPr>
         <p:spPr>
           <a:xfrm>
-            <a:off x="5924403" y="1228672"/>
+            <a:off x="5706192" y="1228672"/>
             <a:ext cx="4221088" cy="530915"/>
           </a:xfrm>
           <a:prstGeom prst="rect">
@@ -16869,7 +16869,7 @@
         </p:nvSpPr>
         <p:spPr>
           <a:xfrm>
-            <a:off x="5924403" y="2034215"/>
+            <a:off x="5706192" y="2034215"/>
             <a:ext cx="4101344" cy="530915"/>
           </a:xfrm>
           <a:prstGeom prst="rect">
@@ -16994,7 +16994,7 @@
         </p:nvSpPr>
         <p:spPr>
           <a:xfrm>
-            <a:off x="5924403" y="2775547"/>
+            <a:off x="5706192" y="2775547"/>
             <a:ext cx="4101344" cy="769441"/>
           </a:xfrm>
           <a:prstGeom prst="rect">
@@ -17148,7 +17148,7 @@
         </p:blipFill>
         <p:spPr>
           <a:xfrm rot="5400000">
-            <a:off x="4904443" y="1587729"/>
+            <a:off x="4686232" y="1587729"/>
             <a:ext cx="362623" cy="624548"/>
           </a:xfrm>
           <a:prstGeom prst="rect">
@@ -17187,7 +17187,7 @@
         </p:blipFill>
         <p:spPr>
           <a:xfrm rot="5400000">
-            <a:off x="4904443" y="2415046"/>
+            <a:off x="4686232" y="2415046"/>
             <a:ext cx="362623" cy="624548"/>
           </a:xfrm>
           <a:prstGeom prst="rect">
@@ -18095,44 +18095,6 @@
           </p:spPr>
         </p:pic>
       </p:grpSp>
-      <p:pic>
-        <p:nvPicPr>
-          <p:cNvPr id="34" name="그림 33">
-            <a:hlinkClick r:id="rId5" action="ppaction://hlinkfile"/>
-            <a:extLst>
-              <a:ext uri="{FF2B5EF4-FFF2-40B4-BE49-F238E27FC236}">
-                <a16:creationId xmlns:a16="http://schemas.microsoft.com/office/drawing/2014/main" id="{E98EEE92-2BAD-48E7-A9E1-5FE5B50C593C}"/>
-              </a:ext>
-            </a:extLst>
-          </p:cNvPr>
-          <p:cNvPicPr>
-            <a:picLocks noChangeAspect="1"/>
-          </p:cNvPicPr>
-          <p:nvPr/>
-        </p:nvPicPr>
-        <p:blipFill rotWithShape="1">
-          <a:blip r:embed="rId6"/>
-          <a:stretch/>
-        </p:blipFill>
-        <p:spPr>
-          <a:xfrm>
-            <a:off x="417123" y="1271745"/>
-            <a:ext cx="3645785" cy="2136473"/>
-          </a:xfrm>
-          <a:prstGeom prst="roundRect">
-            <a:avLst>
-              <a:gd name="adj" fmla="val 3500"/>
-            </a:avLst>
-          </a:prstGeom>
-          <a:effectLst>
-            <a:outerShdw blurRad="228600" dist="50800" dir="5400000" rotWithShape="0">
-              <a:srgbClr val="1B2A4A">
-                <a:alpha val="22000"/>
-              </a:srgbClr>
-            </a:outerShdw>
-          </a:effectLst>
-        </p:spPr>
-      </p:pic>
       <p:sp>
         <p:nvSpPr>
           <p:cNvPr id="32" name="TextBox 31">
@@ -18837,7 +18799,7 @@
           <p:nvPr/>
         </p:nvPicPr>
         <p:blipFill>
-          <a:blip r:embed="rId7"/>
+          <a:blip r:embed="rId5"/>
           <a:stretch>
             <a:fillRect/>
           </a:stretch>
@@ -18867,7 +18829,7 @@
           <p:nvPr/>
         </p:nvPicPr>
         <p:blipFill>
-          <a:blip r:embed="rId8"/>
+          <a:blip r:embed="rId6"/>
           <a:stretch>
             <a:fillRect/>
           </a:stretch>
@@ -18897,13 +18859,13 @@
           <p:nvPr/>
         </p:nvPicPr>
         <p:blipFill>
-          <a:blip r:embed="rId9">
+          <a:blip r:embed="rId7">
             <a:extLst>
               <a:ext uri="{28A0092B-C50C-407E-A947-70E740481C1C}">
                 <a14:useLocalDpi xmlns:a14="http://schemas.microsoft.com/office/drawing/2010/main" val="0"/>
               </a:ext>
               <a:ext uri="{96DAC541-7B7A-43D3-8B79-37D633B846F1}">
-                <asvg:svgBlip xmlns:asvg="http://schemas.microsoft.com/office/drawing/2016/SVG/main" r:embed="rId10"/>
+                <asvg:svgBlip xmlns:asvg="http://schemas.microsoft.com/office/drawing/2016/SVG/main" r:embed="rId8"/>
               </a:ext>
             </a:extLst>
           </a:blip>
@@ -18915,6 +18877,37 @@
           <a:xfrm>
             <a:off x="6817188" y="4753390"/>
             <a:ext cx="320492" cy="320492"/>
+          </a:xfrm>
+          <a:prstGeom prst="rect">
+            <a:avLst/>
+          </a:prstGeom>
+        </p:spPr>
+      </p:pic>
+      <p:pic>
+        <p:nvPicPr>
+          <p:cNvPr id="51" name="그림 50">
+            <a:hlinkClick r:id="rId9" action="ppaction://hlinkfile"/>
+            <a:extLst>
+              <a:ext uri="{FF2B5EF4-FFF2-40B4-BE49-F238E27FC236}">
+                <a16:creationId xmlns:a16="http://schemas.microsoft.com/office/drawing/2014/main" id="{AEE86CA0-2D91-494D-AA7D-58705289DE60}"/>
+              </a:ext>
+            </a:extLst>
+          </p:cNvPr>
+          <p:cNvPicPr>
+            <a:picLocks noChangeAspect="1"/>
+          </p:cNvPicPr>
+          <p:nvPr/>
+        </p:nvPicPr>
+        <p:blipFill>
+          <a:blip r:embed="rId10"/>
+          <a:stretch>
+            <a:fillRect/>
+          </a:stretch>
+        </p:blipFill>
+        <p:spPr>
+          <a:xfrm>
+            <a:off x="407561" y="1158001"/>
+            <a:ext cx="3401618" cy="2548297"/>
           </a:xfrm>
           <a:prstGeom prst="rect">
             <a:avLst/>

--- a/presentation/260916_AI활용_업무지침네비게이터_5차 수정.pptx
+++ b/presentation/260916_AI활용_업무지침네비게이터_5차 수정.pptx
@@ -13,7 +13,7 @@
     <p:sldId id="278" r:id="rId4"/>
     <p:sldId id="279" r:id="rId5"/>
     <p:sldId id="284" r:id="rId6"/>
-    <p:sldId id="280" r:id="rId7"/>
+    <p:sldId id="286" r:id="rId7"/>
     <p:sldId id="283" r:id="rId8"/>
   </p:sldIdLst>
   <p:sldSz cx="9906000" cy="6858000" type="A4"/>
@@ -16546,7 +16546,7 @@
         </p:nvSpPr>
         <p:spPr>
           <a:xfrm>
-            <a:off x="4038944" y="1290892"/>
+            <a:off x="4018162" y="1290892"/>
             <a:ext cx="1657198" cy="406475"/>
           </a:xfrm>
           <a:prstGeom prst="roundRect">
@@ -16615,7 +16615,7 @@
         </p:nvSpPr>
         <p:spPr>
           <a:xfrm>
-            <a:off x="4038944" y="2096435"/>
+            <a:off x="4018162" y="2096435"/>
             <a:ext cx="1657198" cy="406475"/>
           </a:xfrm>
           <a:prstGeom prst="roundRect">
@@ -16702,7 +16702,7 @@
         </p:nvSpPr>
         <p:spPr>
           <a:xfrm>
-            <a:off x="4038945" y="2957030"/>
+            <a:off x="4018163" y="2957030"/>
             <a:ext cx="1657197" cy="406475"/>
           </a:xfrm>
           <a:prstGeom prst="roundRect">
@@ -16765,7 +16765,7 @@
         </p:nvSpPr>
         <p:spPr>
           <a:xfrm>
-            <a:off x="5706192" y="1228672"/>
+            <a:off x="5685410" y="1228672"/>
             <a:ext cx="4221088" cy="530915"/>
           </a:xfrm>
           <a:prstGeom prst="rect">
@@ -16869,7 +16869,7 @@
         </p:nvSpPr>
         <p:spPr>
           <a:xfrm>
-            <a:off x="5706192" y="2034215"/>
+            <a:off x="5685410" y="2034215"/>
             <a:ext cx="4101344" cy="530915"/>
           </a:xfrm>
           <a:prstGeom prst="rect">
@@ -16994,7 +16994,7 @@
         </p:nvSpPr>
         <p:spPr>
           <a:xfrm>
-            <a:off x="5706192" y="2775547"/>
+            <a:off x="5685410" y="2775547"/>
             <a:ext cx="4101344" cy="769441"/>
           </a:xfrm>
           <a:prstGeom prst="rect">
@@ -17148,7 +17148,7 @@
         </p:blipFill>
         <p:spPr>
           <a:xfrm rot="5400000">
-            <a:off x="4686232" y="1587729"/>
+            <a:off x="4665450" y="1587729"/>
             <a:ext cx="362623" cy="624548"/>
           </a:xfrm>
           <a:prstGeom prst="rect">
@@ -17187,7 +17187,7 @@
         </p:blipFill>
         <p:spPr>
           <a:xfrm rot="5400000">
-            <a:off x="4686232" y="2415046"/>
+            <a:off x="4665450" y="2415046"/>
             <a:ext cx="362623" cy="624548"/>
           </a:xfrm>
           <a:prstGeom prst="rect">
@@ -18381,8 +18381,8 @@
         </p:nvSpPr>
         <p:spPr>
           <a:xfrm>
-            <a:off x="1336883" y="5975887"/>
-            <a:ext cx="1670730" cy="292388"/>
+            <a:off x="1336882" y="5975887"/>
+            <a:ext cx="2136839" cy="292388"/>
           </a:xfrm>
           <a:prstGeom prst="rect">
             <a:avLst/>
@@ -18397,7 +18397,7 @@
           <a:p>
             <a:r>
               <a:rPr lang="ko-KR" altLang="en-US" sz="1300" spc="-60"/>
-              <a:t>업무 분류 정확도</a:t>
+              <a:t>업무 분류 정확도 확보</a:t>
             </a:r>
             <a:endParaRPr lang="ko-KR" altLang="en-US" sz="1300" spc="-60">
               <a:solidFill>
@@ -18757,8 +18757,10 @@
                 <a:solidFill>
                   <a:srgbClr val="0F64C0"/>
                 </a:solidFill>
-              </a:rPr>
-              <a:t>/</a:t>
+                <a:latin typeface="맑은 고딕" panose="020B0503020000020004" pitchFamily="50" charset="-127"/>
+                <a:ea typeface="맑은 고딕" panose="020B0503020000020004" pitchFamily="50" charset="-127"/>
+              </a:rPr>
+              <a:t>〮</a:t>
             </a:r>
             <a:r>
               <a:rPr lang="ko-KR" altLang="en-US" sz="1200" b="1" spc="-80">
@@ -18885,7 +18887,7 @@
       </p:pic>
       <p:pic>
         <p:nvPicPr>
-          <p:cNvPr id="51" name="그림 50">
+          <p:cNvPr id="5" name="그림 4">
             <a:hlinkClick r:id="rId9" action="ppaction://hlinkfile"/>
             <a:extLst>
               <a:ext uri="{FF2B5EF4-FFF2-40B4-BE49-F238E27FC236}">
@@ -18906,7 +18908,7 @@
         </p:blipFill>
         <p:spPr>
           <a:xfrm>
-            <a:off x="407561" y="1158001"/>
+            <a:off x="407561" y="1123557"/>
             <a:ext cx="3401618" cy="2548297"/>
           </a:xfrm>
           <a:prstGeom prst="rect">
@@ -18917,7 +18919,7 @@
     </p:spTree>
     <p:extLst>
       <p:ext uri="{BB962C8B-B14F-4D97-AF65-F5344CB8AC3E}">
-        <p14:creationId xmlns:p14="http://schemas.microsoft.com/office/powerpoint/2010/main" val="3296015526"/>
+        <p14:creationId xmlns:p14="http://schemas.microsoft.com/office/powerpoint/2010/main" val="1022704964"/>
       </p:ext>
     </p:extLst>
   </p:cSld>
@@ -19745,7 +19747,7 @@
             <a:p>
               <a:r>
                 <a:rPr lang="ko-KR" altLang="en-US" sz="1400" b="1"/>
-                <a:t>기반 보완</a:t>
+                <a:t>품질 보완</a:t>
               </a:r>
             </a:p>
           </p:txBody>
@@ -19997,11 +19999,7 @@
               <a:rPr lang="ko-KR" altLang="en-US" sz="1300" spc="-40">
                 <a:latin typeface="+mn-ea"/>
               </a:rPr>
-              <a:t>개 </a:t>
-            </a:r>
-            <a:r>
-              <a:rPr lang="ko-KR" altLang="en-US" sz="1300" spc="-40"/>
-              <a:t>부서의 업무 데이터 정비</a:t>
+              <a:t>개 부서의 업무 데이터 정비</a:t>
             </a:r>
             <a:endParaRPr lang="ko-KR" altLang="en-US" sz="1300" spc="-40">
               <a:solidFill>
@@ -20028,7 +20026,7 @@
         <p:spPr>
           <a:xfrm>
             <a:off x="360341" y="5486518"/>
-            <a:ext cx="2959800" cy="292388"/>
+            <a:ext cx="2959800" cy="492443"/>
           </a:xfrm>
           <a:prstGeom prst="rect">
             <a:avLst/>
@@ -20042,8 +20040,33 @@
           <a:lstStyle/>
           <a:p>
             <a:r>
-              <a:rPr lang="ko-KR" altLang="en-US" sz="1300" spc="-40"/>
-              <a:t>명확한 업무부터 핵심 기능 검증</a:t>
+              <a:rPr lang="ko-KR" altLang="en-US" sz="1300" spc="-50">
+                <a:latin typeface="+mn-ea"/>
+              </a:rPr>
+              <a:t>핵심 기능 검증</a:t>
+            </a:r>
+            <a:r>
+              <a:rPr lang="en-US" altLang="ko-KR" sz="1300" spc="-50">
+                <a:latin typeface="+mn-ea"/>
+              </a:rPr>
+              <a:t>, </a:t>
+            </a:r>
+            <a:r>
+              <a:rPr lang="ko-KR" altLang="en-US" sz="1300" spc="-50">
+                <a:latin typeface="+mn-ea"/>
+              </a:rPr>
+              <a:t>서버 확인 절차 등 </a:t>
+            </a:r>
+            <a:endParaRPr lang="en-US" altLang="ko-KR" sz="1300" spc="-50">
+              <a:latin typeface="+mn-ea"/>
+            </a:endParaRPr>
+          </a:p>
+          <a:p>
+            <a:r>
+              <a:rPr lang="ko-KR" altLang="en-US" sz="1300" spc="-50">
+                <a:latin typeface="+mn-ea"/>
+              </a:rPr>
+              <a:t>안전장치 보완</a:t>
             </a:r>
           </a:p>
         </p:txBody>
@@ -20234,8 +20257,8 @@
         </p:nvSpPr>
         <p:spPr>
           <a:xfrm>
-            <a:off x="315347" y="1356790"/>
-            <a:ext cx="4637654" cy="2207293"/>
+            <a:off x="304955" y="1356790"/>
+            <a:ext cx="4747501" cy="2207293"/>
           </a:xfrm>
           <a:prstGeom prst="roundRect">
             <a:avLst>
@@ -20281,7 +20304,7 @@
         </p:nvSpPr>
         <p:spPr>
           <a:xfrm>
-            <a:off x="5014458" y="1356790"/>
+            <a:off x="5087195" y="1356790"/>
             <a:ext cx="4637654" cy="2207293"/>
           </a:xfrm>
           <a:prstGeom prst="roundRect">
@@ -20326,8 +20349,8 @@
         </p:nvSpPr>
         <p:spPr>
           <a:xfrm>
-            <a:off x="321991" y="1878502"/>
-            <a:ext cx="4568663" cy="1338828"/>
+            <a:off x="311600" y="1878502"/>
+            <a:ext cx="4915027" cy="1338828"/>
           </a:xfrm>
           <a:prstGeom prst="rect">
             <a:avLst/>
@@ -20472,13 +20495,13 @@
               <a:rPr lang="ko-KR" altLang="en-US" sz="1400" spc="-40">
                 <a:latin typeface="+mn-ea"/>
               </a:rPr>
-              <a:t> 골든셋 평가로 주관부서 매칭 정확도 </a:t>
+              <a:t> 반복 평가〮모델 개선으로 주관부서 매칭 정확도 </a:t>
             </a:r>
             <a:r>
               <a:rPr lang="en-US" altLang="ko-KR" sz="1400" spc="-40">
                 <a:latin typeface="+mn-ea"/>
               </a:rPr>
-              <a:t>79</a:t>
+              <a:t>63</a:t>
             </a:r>
             <a:r>
               <a:rPr lang="ko-KR" altLang="en-US" sz="1400" spc="-40">
@@ -20492,15 +20515,6 @@
               </a:rPr>
               <a:t>95% </a:t>
             </a:r>
-            <a:r>
-              <a:rPr lang="ko-KR" altLang="en-US" sz="1400" spc="-40">
-                <a:latin typeface="+mn-ea"/>
-              </a:rPr>
-              <a:t>개선</a:t>
-            </a:r>
-            <a:endParaRPr lang="en-US" altLang="ko-KR" sz="1400" spc="-40">
-              <a:latin typeface="+mn-ea"/>
-            </a:endParaRPr>
           </a:p>
           <a:p>
             <a:pPr marL="90488" indent="-90488">
@@ -20541,7 +20555,7 @@
               <a:rPr lang="ko-KR" altLang="en-US" sz="1400" spc="-40">
                 <a:latin typeface="+mn-ea"/>
               </a:rPr>
-              <a:t>자동 채점 시스템 구축 </a:t>
+              <a:t>자동 채점 시스템 경험 </a:t>
             </a:r>
             <a:endParaRPr lang="en-US" altLang="ko-KR" sz="1400" spc="-40">
               <a:latin typeface="+mn-ea"/>
@@ -20563,8 +20577,8 @@
         </p:nvSpPr>
         <p:spPr>
           <a:xfrm>
-            <a:off x="5015345" y="1878502"/>
-            <a:ext cx="5219699" cy="1338828"/>
+            <a:off x="5088082" y="1878502"/>
+            <a:ext cx="4890655" cy="1338828"/>
           </a:xfrm>
           <a:prstGeom prst="rect">
             <a:avLst/>
@@ -20594,36 +20608,36 @@
               <a:buChar char="§"/>
             </a:pPr>
             <a:r>
-              <a:rPr lang="ko-KR" altLang="en-US" sz="1400">
+              <a:rPr lang="ko-KR" altLang="en-US" sz="1400" spc="-40">
                 <a:latin typeface="+mn-ea"/>
               </a:rPr>
               <a:t> 회사 지침</a:t>
             </a:r>
             <a:r>
-              <a:rPr lang="en-US" altLang="ko-KR" sz="1400">
+              <a:rPr lang="en-US" altLang="ko-KR" sz="1400" spc="-40">
                 <a:latin typeface="+mn-ea"/>
               </a:rPr>
               <a:t>, </a:t>
             </a:r>
             <a:r>
-              <a:rPr lang="ko-KR" altLang="en-US" sz="1400">
+              <a:rPr lang="ko-KR" altLang="en-US" sz="1400" spc="-40">
                 <a:latin typeface="+mn-ea"/>
               </a:rPr>
               <a:t>규정</a:t>
             </a:r>
             <a:r>
-              <a:rPr lang="en-US" altLang="ko-KR" sz="1400">
+              <a:rPr lang="en-US" altLang="ko-KR" sz="1400" spc="-40">
                 <a:latin typeface="+mn-ea"/>
               </a:rPr>
               <a:t>, </a:t>
             </a:r>
             <a:r>
-              <a:rPr lang="ko-KR" altLang="en-US" sz="1400">
+              <a:rPr lang="ko-KR" altLang="en-US" sz="1400" spc="-40">
                 <a:latin typeface="+mn-ea"/>
               </a:rPr>
               <a:t>프로세스 데이터 추가 확보</a:t>
             </a:r>
-            <a:endParaRPr lang="en-US" altLang="ko-KR" sz="1400">
+            <a:endParaRPr lang="en-US" altLang="ko-KR" sz="1400" spc="-40">
               <a:latin typeface="+mn-ea"/>
             </a:endParaRPr>
           </a:p>
@@ -20645,18 +20659,18 @@
               <a:buChar char="§"/>
             </a:pPr>
             <a:r>
-              <a:rPr lang="en-US" altLang="ko-KR" sz="1400">
+              <a:rPr lang="en-US" altLang="ko-KR" sz="1400" spc="-40">
                 <a:latin typeface="+mn-ea"/>
               </a:rPr>
               <a:t> </a:t>
             </a:r>
             <a:r>
-              <a:rPr lang="ko-KR" altLang="en-US" sz="1400">
+              <a:rPr lang="ko-KR" altLang="en-US" sz="1400" spc="-40">
                 <a:latin typeface="+mn-ea"/>
               </a:rPr>
               <a:t>실제 업무 데이터로 다양한 상황 검증</a:t>
             </a:r>
-            <a:endParaRPr lang="en-US" altLang="ko-KR" sz="1400">
+            <a:endParaRPr lang="en-US" altLang="ko-KR" sz="1400" spc="-40">
               <a:latin typeface="+mn-ea"/>
             </a:endParaRPr>
           </a:p>
@@ -20678,7 +20692,7 @@
               <a:buChar char="§"/>
             </a:pPr>
             <a:r>
-              <a:rPr lang="en-US" altLang="ko-KR" sz="1400">
+              <a:rPr lang="en-US" altLang="ko-KR" sz="1400" spc="-40">
                 <a:latin typeface="+mn-ea"/>
               </a:rPr>
               <a:t> </a:t>
@@ -20714,18 +20728,18 @@
               <a:buChar char="§"/>
             </a:pPr>
             <a:r>
-              <a:rPr lang="en-US" altLang="ko-KR" sz="1400">
+              <a:rPr lang="en-US" altLang="ko-KR" sz="1400" spc="-40">
                 <a:latin typeface="+mn-ea"/>
               </a:rPr>
               <a:t> </a:t>
             </a:r>
             <a:r>
-              <a:rPr lang="ko-KR" altLang="en-US" sz="1400">
+              <a:rPr lang="ko-KR" altLang="en-US" sz="1400" spc="-40">
                 <a:latin typeface="+mn-ea"/>
               </a:rPr>
               <a:t>현업 사용자 의견을 반영한 서비스 향상</a:t>
             </a:r>
-            <a:endParaRPr lang="en-US" altLang="ko-KR" sz="1400">
+            <a:endParaRPr lang="en-US" altLang="ko-KR" sz="1400" spc="-40">
               <a:latin typeface="+mn-ea"/>
             </a:endParaRPr>
           </a:p>
@@ -20968,7 +20982,7 @@
         </p:nvSpPr>
         <p:spPr>
           <a:xfrm>
-            <a:off x="5662058" y="1223492"/>
+            <a:off x="5734795" y="1223492"/>
             <a:ext cx="3359671" cy="314383"/>
           </a:xfrm>
           <a:prstGeom prst="roundRect">
@@ -21023,7 +21037,7 @@
         </p:nvSpPr>
         <p:spPr>
           <a:xfrm>
-            <a:off x="962947" y="1223492"/>
+            <a:off x="952556" y="1223492"/>
             <a:ext cx="3359671" cy="314383"/>
           </a:xfrm>
           <a:prstGeom prst="roundRect">

--- a/presentation/260916_AI활용_업무지침네비게이터_5차 수정.pptx
+++ b/presentation/260916_AI활용_업무지침네비게이터_5차 수정.pptx
@@ -12,7 +12,7 @@
     <p:sldId id="263" r:id="rId3"/>
     <p:sldId id="278" r:id="rId4"/>
     <p:sldId id="279" r:id="rId5"/>
-    <p:sldId id="284" r:id="rId6"/>
+    <p:sldId id="282" r:id="rId6"/>
     <p:sldId id="286" r:id="rId7"/>
     <p:sldId id="283" r:id="rId8"/>
   </p:sldIdLst>
@@ -13474,7 +13474,7 @@
               <a:rPr lang="ko-KR" altLang="en-US" sz="1300" spc="-40">
                 <a:latin typeface="+mn-ea"/>
               </a:rPr>
-              <a:t>종합 정답률 상승 </a:t>
+              <a:t>골든셋 정답률 상승 </a:t>
             </a:r>
             <a:endParaRPr lang="ko-KR" altLang="en-US" sz="1300" spc="-40">
               <a:solidFill>
@@ -13726,17 +13726,7 @@
                 <a:latin typeface="+mn-ea"/>
                 <a:sym typeface="Wingdings" panose="05000000000000000000" pitchFamily="2" charset="2"/>
               </a:rPr>
-              <a:t>89%, F1 score</a:t>
-            </a:r>
-            <a:r>
-              <a:rPr lang="ko-KR" altLang="en-US" sz="1200" b="1" spc="-60">
-                <a:solidFill>
-                  <a:srgbClr val="0F64C0"/>
-                </a:solidFill>
-                <a:latin typeface="+mn-ea"/>
-                <a:sym typeface="Wingdings" panose="05000000000000000000" pitchFamily="2" charset="2"/>
-              </a:rPr>
-              <a:t>로 측정</a:t>
+              <a:t>89%</a:t>
             </a:r>
             <a:r>
               <a:rPr lang="en-US" altLang="ko-KR" sz="1200" b="1" spc="-60">
@@ -13841,17 +13831,7 @@
                 <a:latin typeface="+mn-ea"/>
                 <a:sym typeface="Wingdings" panose="05000000000000000000" pitchFamily="2" charset="2"/>
               </a:rPr>
-              <a:t>79%, </a:t>
-            </a:r>
-            <a:r>
-              <a:rPr lang="ko-KR" altLang="en-US" sz="1200" b="1" spc="-60">
-                <a:solidFill>
-                  <a:srgbClr val="0F64C0"/>
-                </a:solidFill>
-                <a:latin typeface="+mn-ea"/>
-                <a:sym typeface="Wingdings" panose="05000000000000000000" pitchFamily="2" charset="2"/>
-              </a:rPr>
-              <a:t>일치율로 측정</a:t>
+              <a:t>79%</a:t>
             </a:r>
             <a:endParaRPr lang="ko-KR" altLang="en-US" sz="1200" b="1" spc="-60">
               <a:solidFill>
@@ -13908,47 +13888,7 @@
                 <a:latin typeface="+mn-ea"/>
                 <a:sym typeface="Wingdings" panose="05000000000000000000" pitchFamily="2" charset="2"/>
               </a:rPr>
-              <a:t>19</a:t>
-            </a:r>
-            <a:r>
-              <a:rPr lang="ko-KR" altLang="en-US" sz="1200" b="1" spc="-80">
-                <a:solidFill>
-                  <a:srgbClr val="0F64C0"/>
-                </a:solidFill>
-                <a:latin typeface="+mn-ea"/>
-                <a:sym typeface="Wingdings" panose="05000000000000000000" pitchFamily="2" charset="2"/>
-              </a:rPr>
-              <a:t>건</a:t>
-            </a:r>
-            <a:r>
-              <a:rPr lang="en-US" altLang="ko-KR" sz="1200" b="1" spc="-80">
-                <a:solidFill>
-                  <a:srgbClr val="0F64C0"/>
-                </a:solidFill>
-                <a:latin typeface="+mn-ea"/>
-                <a:sym typeface="Wingdings" panose="05000000000000000000" pitchFamily="2" charset="2"/>
-              </a:rPr>
-              <a:t> </a:t>
-            </a:r>
-            <a:r>
-              <a:rPr lang="ko-KR" altLang="en-US" sz="1200" b="1" spc="-80">
-                <a:solidFill>
-                  <a:srgbClr val="0F64C0"/>
-                </a:solidFill>
-                <a:latin typeface="+mn-ea"/>
-                <a:sym typeface="Wingdings" panose="05000000000000000000" pitchFamily="2" charset="2"/>
-              </a:rPr>
-              <a:t>자동 채점</a:t>
-            </a:r>
-            <a:r>
-              <a:rPr lang="en-US" altLang="ko-KR" sz="1200" b="1" spc="-80">
-                <a:solidFill>
-                  <a:srgbClr val="0F64C0"/>
-                </a:solidFill>
-                <a:latin typeface="+mn-ea"/>
-                <a:sym typeface="Wingdings" panose="05000000000000000000" pitchFamily="2" charset="2"/>
-              </a:rPr>
-              <a:t>, 37 </a:t>
+              <a:t>37 </a:t>
             </a:r>
             <a:r>
               <a:rPr lang="ko-KR" altLang="en-US" sz="1200" b="1" spc="-40">
@@ -13966,7 +13906,25 @@
                 </a:solidFill>
                 <a:latin typeface="+mn-ea"/>
               </a:rPr>
-              <a:t>68%</a:t>
+              <a:t>58 </a:t>
+            </a:r>
+            <a:r>
+              <a:rPr lang="ko-KR" altLang="en-US" sz="1200" b="1" spc="-40">
+                <a:solidFill>
+                  <a:srgbClr val="2082C8"/>
+                </a:solidFill>
+                <a:latin typeface="+mn-ea"/>
+              </a:rPr>
+              <a:t>→</a:t>
+            </a:r>
+            <a:r>
+              <a:rPr lang="en-US" altLang="ko-KR" sz="1200" b="1" spc="-40">
+                <a:solidFill>
+                  <a:srgbClr val="2082C8"/>
+                </a:solidFill>
+                <a:latin typeface="+mn-ea"/>
+              </a:rPr>
+              <a:t> 68%</a:t>
             </a:r>
             <a:r>
               <a:rPr lang="en-US" altLang="ko-KR" sz="1200" b="1" spc="-80">
@@ -14068,7 +14026,7 @@
                 </a:solidFill>
                 <a:latin typeface="+mn-ea"/>
               </a:rPr>
-              <a:t>종합 정답률 개선 </a:t>
+              <a:t>골든셋 정답률 개선 </a:t>
             </a:r>
           </a:p>
         </p:txBody>
@@ -14532,6 +14490,12 @@
               </a:rPr>
               <a:t>로 질문→검색→답변 과정 트레이싱</a:t>
             </a:r>
+            <a:r>
+              <a:rPr lang="en-US" altLang="ko-KR" sz="1500" b="1" spc="-30">
+                <a:latin typeface="+mn-ea"/>
+              </a:rPr>
+              <a:t>*</a:t>
+            </a:r>
             <a:endParaRPr lang="ko-KR" altLang="en-US" sz="1500" b="1" spc="-30"/>
           </a:p>
         </p:txBody>
@@ -14784,7 +14748,7 @@
         <p:spPr>
           <a:xfrm>
             <a:off x="5481206" y="3235224"/>
-            <a:ext cx="4221262" cy="543739"/>
+            <a:ext cx="4618758" cy="543739"/>
           </a:xfrm>
           <a:prstGeom prst="rect">
             <a:avLst/>
@@ -14806,7 +14770,7 @@
               <a:rPr lang="ko-KR" altLang="en-US" sz="1300" spc="-40">
                 <a:latin typeface="+mn-ea"/>
               </a:rPr>
-              <a:t>반복 재평가로 개선 효과를 정량 확인 </a:t>
+              <a:t>반복 재평가로 개선 효과 정량적 확인 </a:t>
             </a:r>
             <a:endParaRPr lang="en-US" altLang="ko-KR" sz="1300" spc="-40">
               <a:latin typeface="+mn-ea"/>
@@ -14819,48 +14783,48 @@
               </a:spcBef>
             </a:pPr>
             <a:r>
-              <a:rPr lang="en-US" altLang="ko-KR" sz="1300" spc="-40">
+              <a:rPr lang="en-US" altLang="ko-KR" sz="1300" spc="-80">
                 <a:latin typeface="+mn-ea"/>
               </a:rPr>
               <a:t>3</a:t>
             </a:r>
             <a:r>
-              <a:rPr lang="ko-KR" altLang="en-US" sz="1300" spc="-40">
-                <a:latin typeface="+mn-ea"/>
-              </a:rPr>
-              <a:t>라운드에 걸쳐 정답률 단계적 개선 </a:t>
-            </a:r>
-            <a:r>
-              <a:rPr lang="en-US" altLang="ko-KR" sz="1300" spc="-40">
+              <a:rPr lang="ko-KR" altLang="en-US" sz="1300" spc="-80">
+                <a:latin typeface="+mn-ea"/>
+              </a:rPr>
+              <a:t>라운드에 걸쳐 골든셋 정답률 단계적 개선 </a:t>
+            </a:r>
+            <a:r>
+              <a:rPr lang="en-US" altLang="ko-KR" sz="1300" spc="-80">
                 <a:latin typeface="+mn-ea"/>
               </a:rPr>
               <a:t>(37</a:t>
             </a:r>
             <a:r>
-              <a:rPr lang="ko-KR" altLang="en-US" sz="1300" spc="-40">
+              <a:rPr lang="ko-KR" altLang="en-US" sz="1300" spc="-80">
                 <a:latin typeface="+mn-ea"/>
               </a:rPr>
               <a:t>→</a:t>
             </a:r>
             <a:r>
-              <a:rPr lang="en-US" altLang="ko-KR" sz="1300" spc="-40">
+              <a:rPr lang="en-US" altLang="ko-KR" sz="1300" spc="-80">
                 <a:latin typeface="+mn-ea"/>
               </a:rPr>
               <a:t>58</a:t>
             </a:r>
             <a:r>
-              <a:rPr lang="ko-KR" altLang="en-US" sz="1300" spc="-40">
+              <a:rPr lang="ko-KR" altLang="en-US" sz="1300" spc="-80">
                 <a:latin typeface="+mn-ea"/>
               </a:rPr>
               <a:t>→</a:t>
             </a:r>
             <a:r>
-              <a:rPr lang="en-US" altLang="ko-KR" sz="1300" spc="-40">
+              <a:rPr lang="en-US" altLang="ko-KR" sz="1300" spc="-80">
                 <a:latin typeface="+mn-ea"/>
               </a:rPr>
               <a:t>68%)</a:t>
             </a:r>
-            <a:endParaRPr lang="ko-KR" altLang="en-US" sz="1300" spc="-40">
+            <a:endParaRPr lang="ko-KR" altLang="en-US" sz="1300" spc="-80">
               <a:latin typeface="+mn-ea"/>
             </a:endParaRPr>
           </a:p>
@@ -16310,10 +16274,66 @@
           </a:p>
         </p:txBody>
       </p:sp>
+      <p:sp>
+        <p:nvSpPr>
+          <p:cNvPr id="72" name="TextBox 71">
+            <a:extLst>
+              <a:ext uri="{FF2B5EF4-FFF2-40B4-BE49-F238E27FC236}">
+                <a16:creationId xmlns:a16="http://schemas.microsoft.com/office/drawing/2014/main" id="{9F1399A8-F879-4FEC-9DFB-1D11467EC11B}"/>
+              </a:ext>
+            </a:extLst>
+          </p:cNvPr>
+          <p:cNvSpPr txBox="1"/>
+          <p:nvPr/>
+        </p:nvSpPr>
+        <p:spPr>
+          <a:xfrm>
+            <a:off x="2566555" y="3675056"/>
+            <a:ext cx="2286571" cy="276999"/>
+          </a:xfrm>
+          <a:prstGeom prst="rect">
+            <a:avLst/>
+          </a:prstGeom>
+          <a:noFill/>
+        </p:spPr>
+        <p:txBody>
+          <a:bodyPr wrap="square" rtlCol="0">
+            <a:spAutoFit/>
+          </a:bodyPr>
+          <a:lstStyle/>
+          <a:p>
+            <a:pPr algn="r"/>
+            <a:r>
+              <a:rPr lang="en-US" altLang="ko-KR" sz="1200">
+                <a:latin typeface="+mn-ea"/>
+              </a:rPr>
+              <a:t>* </a:t>
+            </a:r>
+            <a:r>
+              <a:rPr lang="ko-KR" altLang="en-US" sz="1200">
+                <a:latin typeface="+mn-ea"/>
+              </a:rPr>
+              <a:t>골든셋 </a:t>
+            </a:r>
+            <a:r>
+              <a:rPr lang="en-US" altLang="ko-KR" sz="1200">
+                <a:latin typeface="+mn-ea"/>
+              </a:rPr>
+              <a:t>19</a:t>
+            </a:r>
+            <a:r>
+              <a:rPr lang="ko-KR" altLang="en-US" sz="1200">
+                <a:latin typeface="+mn-ea"/>
+              </a:rPr>
+              <a:t>건 기준</a:t>
+            </a:r>
+          </a:p>
+        </p:txBody>
+      </p:sp>
     </p:spTree>
     <p:extLst>
       <p:ext uri="{BB962C8B-B14F-4D97-AF65-F5344CB8AC3E}">
-        <p14:creationId xmlns:p14="http://schemas.microsoft.com/office/powerpoint/2010/main" val="3514393205"/>
+        <p14:creationId xmlns:p14="http://schemas.microsoft.com/office/powerpoint/2010/main" val="2381020833"/>
       </p:ext>
     </p:extLst>
   </p:cSld>
